--- a/Science_Teesside/Teaching_Packs/BUILD/lessons/W6B/BUILD_Science_Autumn1_W6B_Model_Plate_Comparison.pptx
+++ b/Science_Teesside/Teaching_Packs/BUILD/lessons/W6B/BUILD_Science_Autumn1_W6B_Model_Plate_Comparison.pptx
@@ -2,22 +2,22 @@
 <file path=ppt/presentation.xml><?xml version="1.0" encoding="utf-8"?>
 <p:presentation xmlns:p="http://schemas.openxmlformats.org/presentationml/2006/main">
   <p:sldMasterIdLst>
-    <p:sldMasterId xmlns:r="http://schemas.openxmlformats.org/officeDocument/2006/relationships" id="2147483648" r:id="R997fafea02cb4429"/>
+    <p:sldMasterId xmlns:r="http://schemas.openxmlformats.org/officeDocument/2006/relationships" id="2147483648" r:id="Rb10e1d8fc61749ae"/>
   </p:sldMasterIdLst>
   <p:notesMasterIdLst>
-    <p:notesMasterId xmlns:r="http://schemas.openxmlformats.org/officeDocument/2006/relationships" r:id="R68a358907e4e4abd"/>
+    <p:notesMasterId xmlns:r="http://schemas.openxmlformats.org/officeDocument/2006/relationships" r:id="Radd56123c38047c3"/>
   </p:notesMasterIdLst>
   <p:sldIdLst>
-    <p:sldId xmlns:r="http://schemas.openxmlformats.org/officeDocument/2006/relationships" id="256" r:id="R8e6b3c8ef48b4569"/>
-    <p:sldId xmlns:r="http://schemas.openxmlformats.org/officeDocument/2006/relationships" id="257" r:id="Rc0b8e2f5b2ba4c0a"/>
-    <p:sldId xmlns:r="http://schemas.openxmlformats.org/officeDocument/2006/relationships" id="258" r:id="R6b69afed109a4342"/>
-    <p:sldId xmlns:r="http://schemas.openxmlformats.org/officeDocument/2006/relationships" id="259" r:id="R56d4759432394502"/>
-    <p:sldId xmlns:r="http://schemas.openxmlformats.org/officeDocument/2006/relationships" id="260" r:id="R60892e5d9d73421e"/>
-    <p:sldId xmlns:r="http://schemas.openxmlformats.org/officeDocument/2006/relationships" id="261" r:id="R0d8245f6b8804939"/>
-    <p:sldId xmlns:r="http://schemas.openxmlformats.org/officeDocument/2006/relationships" id="262" r:id="Raf101783f8d84b17"/>
-    <p:sldId xmlns:r="http://schemas.openxmlformats.org/officeDocument/2006/relationships" id="263" r:id="R54657a6995884d96"/>
-    <p:sldId xmlns:r="http://schemas.openxmlformats.org/officeDocument/2006/relationships" id="264" r:id="Rb59d50c85fbe4404"/>
-    <p:sldId xmlns:r="http://schemas.openxmlformats.org/officeDocument/2006/relationships" id="265" r:id="R4865a4b0223d4aa4"/>
+    <p:sldId xmlns:r="http://schemas.openxmlformats.org/officeDocument/2006/relationships" id="256" r:id="Rcefb8390aed54f83"/>
+    <p:sldId xmlns:r="http://schemas.openxmlformats.org/officeDocument/2006/relationships" id="257" r:id="R72d7490fdaa04da9"/>
+    <p:sldId xmlns:r="http://schemas.openxmlformats.org/officeDocument/2006/relationships" id="258" r:id="R641aa4077232474a"/>
+    <p:sldId xmlns:r="http://schemas.openxmlformats.org/officeDocument/2006/relationships" id="259" r:id="R8913fb561b1b4db2"/>
+    <p:sldId xmlns:r="http://schemas.openxmlformats.org/officeDocument/2006/relationships" id="260" r:id="Rcabd2a45d93341fb"/>
+    <p:sldId xmlns:r="http://schemas.openxmlformats.org/officeDocument/2006/relationships" id="261" r:id="R7003f6921c3e4b96"/>
+    <p:sldId xmlns:r="http://schemas.openxmlformats.org/officeDocument/2006/relationships" id="262" r:id="R039e10f692d94dc1"/>
+    <p:sldId xmlns:r="http://schemas.openxmlformats.org/officeDocument/2006/relationships" id="263" r:id="R42f15a5834a641a8"/>
+    <p:sldId xmlns:r="http://schemas.openxmlformats.org/officeDocument/2006/relationships" id="264" r:id="R4d9c95ee41af4ac8"/>
+    <p:sldId xmlns:r="http://schemas.openxmlformats.org/officeDocument/2006/relationships" id="265" r:id="R47ea091d19804b0c"/>
   </p:sldIdLst>
   <p:sldSz cx="12192000" cy="6858000"/>
   <p:notesSz cx="6858000" cy="9144000"/>
@@ -499,6 +499,15 @@
               <a:t>[/Sources]</a:t>
             </a:r>
           </a:p>
+          <a:p xmlns:a="http://schemas.openxmlformats.org/drawingml/2006/main">
+            <a:r>
+              <a:t>
+[Sources]
+https://madebymatt.uk/Lessons/Science_Teesside/Teaching_Packs/BUILD/ — original lesson text, timings and teacher notes retained.
+https://madebymatt.uk/Lessons/Science_Teesside/Build/ — existing Made by Matt scientific artwork, where shown.
+[/Sources]</a:t>
+            </a:r>
+          </a:p>
         </p:txBody>
       </p:sp>
       <p:sp>
@@ -614,6 +623,15 @@
               <a:t>[/Sources]</a:t>
             </a:r>
           </a:p>
+          <a:p xmlns:a="http://schemas.openxmlformats.org/drawingml/2006/main">
+            <a:r>
+              <a:t>
+[Sources]
+https://madebymatt.uk/Lessons/Science_Teesside/Teaching_Packs/BUILD/ — original lesson text, timings and teacher notes retained.
+https://madebymatt.uk/Lessons/Science_Teesside/Build/ — existing Made by Matt scientific artwork, where shown.
+[/Sources]</a:t>
+            </a:r>
+          </a:p>
         </p:txBody>
       </p:sp>
       <p:sp>
@@ -729,6 +747,15 @@
               <a:t>[/Sources]</a:t>
             </a:r>
           </a:p>
+          <a:p xmlns:a="http://schemas.openxmlformats.org/drawingml/2006/main">
+            <a:r>
+              <a:t>
+[Sources]
+https://madebymatt.uk/Lessons/Science_Teesside/Teaching_Packs/BUILD/ — original lesson text, timings and teacher notes retained.
+https://madebymatt.uk/Lessons/Science_Teesside/Build/ — existing Made by Matt scientific artwork, where shown.
+[/Sources]</a:t>
+            </a:r>
+          </a:p>
         </p:txBody>
       </p:sp>
       <p:sp>
@@ -844,6 +871,15 @@
               <a:t>[/Sources]</a:t>
             </a:r>
           </a:p>
+          <a:p xmlns:a="http://schemas.openxmlformats.org/drawingml/2006/main">
+            <a:r>
+              <a:t>
+[Sources]
+https://madebymatt.uk/Lessons/Science_Teesside/Teaching_Packs/BUILD/ — original lesson text, timings and teacher notes retained.
+https://madebymatt.uk/Lessons/Science_Teesside/Build/ — existing Made by Matt scientific artwork, where shown.
+[/Sources]</a:t>
+            </a:r>
+          </a:p>
         </p:txBody>
       </p:sp>
       <p:sp>
@@ -959,6 +995,15 @@
               <a:t>[/Sources]</a:t>
             </a:r>
           </a:p>
+          <a:p xmlns:a="http://schemas.openxmlformats.org/drawingml/2006/main">
+            <a:r>
+              <a:t>
+[Sources]
+https://madebymatt.uk/Lessons/Science_Teesside/Teaching_Packs/BUILD/ — original lesson text, timings and teacher notes retained.
+https://madebymatt.uk/Lessons/Science_Teesside/Build/ — existing Made by Matt scientific artwork, where shown.
+[/Sources]</a:t>
+            </a:r>
+          </a:p>
         </p:txBody>
       </p:sp>
       <p:sp>
@@ -1074,6 +1119,15 @@
               <a:t>[/Sources]</a:t>
             </a:r>
           </a:p>
+          <a:p xmlns:a="http://schemas.openxmlformats.org/drawingml/2006/main">
+            <a:r>
+              <a:t>
+[Sources]
+https://madebymatt.uk/Lessons/Science_Teesside/Teaching_Packs/BUILD/ — original lesson text, timings and teacher notes retained.
+https://madebymatt.uk/Lessons/Science_Teesside/Build/ — existing Made by Matt scientific artwork, where shown.
+[/Sources]</a:t>
+            </a:r>
+          </a:p>
         </p:txBody>
       </p:sp>
       <p:sp>
@@ -1189,6 +1243,15 @@
               <a:t>[/Sources]</a:t>
             </a:r>
           </a:p>
+          <a:p xmlns:a="http://schemas.openxmlformats.org/drawingml/2006/main">
+            <a:r>
+              <a:t>
+[Sources]
+https://madebymatt.uk/Lessons/Science_Teesside/Teaching_Packs/BUILD/ — original lesson text, timings and teacher notes retained.
+https://madebymatt.uk/Lessons/Science_Teesside/Build/ — existing Made by Matt scientific artwork, where shown.
+[/Sources]</a:t>
+            </a:r>
+          </a:p>
         </p:txBody>
       </p:sp>
       <p:sp>
@@ -1304,6 +1367,15 @@
               <a:t>[/Sources]</a:t>
             </a:r>
           </a:p>
+          <a:p xmlns:a="http://schemas.openxmlformats.org/drawingml/2006/main">
+            <a:r>
+              <a:t>
+[Sources]
+https://madebymatt.uk/Lessons/Science_Teesside/Teaching_Packs/BUILD/ — original lesson text, timings and teacher notes retained.
+https://madebymatt.uk/Lessons/Science_Teesside/Build/ — existing Made by Matt scientific artwork, where shown.
+[/Sources]</a:t>
+            </a:r>
+          </a:p>
         </p:txBody>
       </p:sp>
       <p:sp>
@@ -1419,6 +1491,15 @@
               <a:t>[/Sources]</a:t>
             </a:r>
           </a:p>
+          <a:p xmlns:a="http://schemas.openxmlformats.org/drawingml/2006/main">
+            <a:r>
+              <a:t>
+[Sources]
+https://madebymatt.uk/Lessons/Science_Teesside/Teaching_Packs/BUILD/ — original lesson text, timings and teacher notes retained.
+https://madebymatt.uk/Lessons/Science_Teesside/Build/ — existing Made by Matt scientific artwork, where shown.
+[/Sources]</a:t>
+            </a:r>
+          </a:p>
         </p:txBody>
       </p:sp>
       <p:sp>
@@ -1532,6 +1613,15 @@
           <a:p xmlns:a="http://schemas.openxmlformats.org/drawingml/2006/main">
             <a:r>
               <a:t>[/Sources]</a:t>
+            </a:r>
+          </a:p>
+          <a:p xmlns:a="http://schemas.openxmlformats.org/drawingml/2006/main">
+            <a:r>
+              <a:t>
+[Sources]
+https://madebymatt.uk/Lessons/Science_Teesside/Teaching_Packs/BUILD/ — original lesson text, timings and teacher notes retained.
+https://madebymatt.uk/Lessons/Science_Teesside/Build/ — existing Made by Matt scientific artwork, where shown.
+[/Sources]</a:t>
             </a:r>
           </a:p>
         </p:txBody>
@@ -1599,7 +1689,7 @@
   </p:cSld>
   <p:clrMap bg1="lt1" tx1="dk1" bg2="lt2" tx2="dk2" accent1="accent1" accent2="accent2" accent3="accent3" accent4="accent4" accent5="accent5" accent6="accent6" hlink="hlink" folHlink="folHlink"/>
   <p:sldLayoutIdLst>
-    <p:sldLayoutId xmlns:r="http://schemas.openxmlformats.org/officeDocument/2006/relationships" id="2147483649" r:id="Rc564bfe77f22460b"/>
+    <p:sldLayoutId xmlns:r="http://schemas.openxmlformats.org/officeDocument/2006/relationships" id="2147483649" r:id="R301e8a4c2cef4df3"/>
   </p:sldLayoutIdLst>
   <p:txStyles>
     <p:titleStyle>
@@ -2132,7 +2222,7 @@
     <p:bg>
       <p:bgPr>
         <a:solidFill xmlns:a="http://schemas.openxmlformats.org/drawingml/2006/main">
-          <a:srgbClr val="F5F1E8"/>
+          <a:srgbClr val="FBF9F3"/>
         </a:solidFill>
       </p:bgPr>
     </p:bg>
@@ -2161,8 +2251,8 @@
         </p:nvSpPr>
         <p:spPr>
           <a:xfrm xmlns:a="http://schemas.openxmlformats.org/drawingml/2006/main">
-            <a:off x="609600" y="552450"/>
-            <a:ext cx="781050" cy="57150"/>
+            <a:off x="609600" y="742950"/>
+            <a:ext cx="9906000" cy="38100"/>
           </a:xfrm>
           <a:prstGeom xmlns:a="http://schemas.openxmlformats.org/drawingml/2006/main" prst="rect">
             <a:avLst/>
@@ -2192,8 +2282,8 @@
         </p:nvSpPr>
         <p:spPr>
           <a:xfrm xmlns:a="http://schemas.openxmlformats.org/drawingml/2006/main">
-            <a:off x="609600" y="762000"/>
-            <a:ext cx="9334500" cy="285750"/>
+            <a:off x="609600" y="342900"/>
+            <a:ext cx="9334500" cy="266700"/>
           </a:xfrm>
           <a:prstGeom xmlns:a="http://schemas.openxmlformats.org/drawingml/2006/main" prst="rect">
             <a:avLst/>
@@ -2205,21 +2295,30 @@
           </a:ln>
         </p:spPr>
         <p:txBody>
-          <a:bodyPr xmlns:a="http://schemas.openxmlformats.org/drawingml/2006/main" lIns="0" tIns="0" rIns="0" bIns="0" anchor="ctr"/>
+          <a:bodyPr xmlns:a="http://schemas.openxmlformats.org/drawingml/2006/main" wrap="square" lIns="0" tIns="0" rIns="0" bIns="0" anchor="ctr">
+            <a:noAutofit/>
+          </a:bodyPr>
           <a:lstStyle xmlns:a="http://schemas.openxmlformats.org/drawingml/2006/main"/>
           <a:p xmlns:a="http://schemas.openxmlformats.org/drawingml/2006/main">
             <a:pPr>
-              <a:defRPr sz="1500" b="1">
+              <a:buNone/>
+              <a:defRPr sz="1425" b="1">
                 <a:solidFill>
                   <a:srgbClr val="28685E"/>
                 </a:solidFill>
+                <a:latin typeface="Arial"/>
+                <a:ea typeface="Arial"/>
+                <a:cs typeface="Arial"/>
               </a:defRPr>
             </a:pPr>
             <a:r>
-              <a:rPr sz="1500" b="1">
+              <a:rPr sz="1425" b="1">
                 <a:solidFill>
                   <a:srgbClr val="28685E"/>
                 </a:solidFill>
+                <a:latin typeface="Arial"/>
+                <a:ea typeface="Arial"/>
+                <a:cs typeface="Arial"/>
               </a:rPr>
               <a:t>MADE BY MATT  /  BUILD SCIENCE</a:t>
             </a:r>
@@ -2228,14 +2327,14 @@
       </p:sp>
       <p:pic>
         <p:nvPicPr>
-          <p:cNvPr id="12" name=""/>
+          <p:cNvPr id="15" name=""/>
           <p:cNvPicPr>
             <a:picLocks xmlns:a="http://schemas.openxmlformats.org/drawingml/2006/main" noChangeAspect="1"/>
           </p:cNvPicPr>
           <p:nvPr/>
         </p:nvPicPr>
         <p:blipFill>
-          <a:blip xmlns:r="http://schemas.openxmlformats.org/officeDocument/2006/relationships" xmlns:a="http://schemas.openxmlformats.org/drawingml/2006/main" r:embed="R62e2c09da4304336"/>
+          <a:blip xmlns:r="http://schemas.openxmlformats.org/officeDocument/2006/relationships" xmlns:a="http://schemas.openxmlformats.org/drawingml/2006/main" r:embed="R74a145570eab4493"/>
           <a:stretch xmlns:a="http://schemas.openxmlformats.org/drawingml/2006/main"/>
         </p:blipFill>
         <p:spPr>
@@ -2264,8 +2363,8 @@
         </p:nvSpPr>
         <p:spPr>
           <a:xfrm xmlns:a="http://schemas.openxmlformats.org/drawingml/2006/main">
-            <a:off x="609600" y="1352550"/>
-            <a:ext cx="10972800" cy="952500"/>
+            <a:off x="609600" y="1047750"/>
+            <a:ext cx="10972800" cy="895350"/>
           </a:xfrm>
           <a:prstGeom xmlns:a="http://schemas.openxmlformats.org/drawingml/2006/main" prst="rect">
             <a:avLst/>
@@ -2277,21 +2376,30 @@
           </a:ln>
         </p:spPr>
         <p:txBody>
-          <a:bodyPr xmlns:a="http://schemas.openxmlformats.org/drawingml/2006/main" lIns="0" tIns="0" rIns="0" bIns="0" anchor="ctr"/>
+          <a:bodyPr xmlns:a="http://schemas.openxmlformats.org/drawingml/2006/main" wrap="square" lIns="0" tIns="0" rIns="0" bIns="0" anchor="ctr">
+            <a:noAutofit/>
+          </a:bodyPr>
           <a:lstStyle xmlns:a="http://schemas.openxmlformats.org/drawingml/2006/main"/>
           <a:p xmlns:a="http://schemas.openxmlformats.org/drawingml/2006/main">
             <a:pPr>
-              <a:defRPr sz="3750" b="1">
+              <a:buNone/>
+              <a:defRPr sz="3600" b="1">
                 <a:solidFill>
                   <a:srgbClr val="152B3A"/>
                 </a:solidFill>
+                <a:latin typeface="Arial"/>
+                <a:ea typeface="Arial"/>
+                <a:cs typeface="Arial"/>
               </a:defRPr>
             </a:pPr>
             <a:r>
-              <a:rPr sz="3750" b="1">
+              <a:rPr sz="3600" b="1">
                 <a:solidFill>
                   <a:srgbClr val="152B3A"/>
                 </a:solidFill>
+                <a:latin typeface="Arial"/>
+                <a:ea typeface="Arial"/>
+                <a:cs typeface="Arial"/>
               </a:rPr>
               <a:t>Compare and revise model plates</a:t>
             </a:r>
@@ -2358,21 +2466,30 @@
           </a:ln>
         </p:spPr>
         <p:txBody>
-          <a:bodyPr xmlns:a="http://schemas.openxmlformats.org/drawingml/2006/main" lIns="0" tIns="0" rIns="0" bIns="0" anchor="ctr"/>
+          <a:bodyPr xmlns:a="http://schemas.openxmlformats.org/drawingml/2006/main" wrap="square" lIns="0" tIns="0" rIns="0" bIns="0" anchor="ctr">
+            <a:noAutofit/>
+          </a:bodyPr>
           <a:lstStyle xmlns:a="http://schemas.openxmlformats.org/drawingml/2006/main"/>
           <a:p xmlns:a="http://schemas.openxmlformats.org/drawingml/2006/main">
             <a:pPr>
-              <a:defRPr sz="1275" b="0">
+              <a:buNone/>
+              <a:defRPr sz="1200" b="0">
                 <a:solidFill>
                   <a:srgbClr val="50616B"/>
                 </a:solidFill>
+                <a:latin typeface="Arial"/>
+                <a:ea typeface="Arial"/>
+                <a:cs typeface="Arial"/>
               </a:defRPr>
             </a:pPr>
             <a:r>
-              <a:rPr sz="1275" b="0">
+              <a:rPr sz="1200" b="0">
                 <a:solidFill>
                   <a:srgbClr val="50616B"/>
                 </a:solidFill>
+                <a:latin typeface="Arial"/>
+                <a:ea typeface="Arial"/>
+                <a:cs typeface="Arial"/>
               </a:rPr>
               <a:t>AUTUMN 1  ·  WEEK 6  ·  LESSON B</a:t>
             </a:r>
@@ -2408,14 +2525,20 @@
           </a:ln>
         </p:spPr>
         <p:txBody>
-          <a:bodyPr xmlns:a="http://schemas.openxmlformats.org/drawingml/2006/main" lIns="0" tIns="0" rIns="0" bIns="0" anchor="ctr"/>
+          <a:bodyPr xmlns:a="http://schemas.openxmlformats.org/drawingml/2006/main" wrap="square" lIns="0" tIns="0" rIns="0" bIns="0" anchor="ctr">
+            <a:noAutofit/>
+          </a:bodyPr>
           <a:lstStyle xmlns:a="http://schemas.openxmlformats.org/drawingml/2006/main"/>
           <a:p xmlns:a="http://schemas.openxmlformats.org/drawingml/2006/main">
             <a:pPr>
+              <a:buNone/>
               <a:defRPr sz="1350" b="1">
                 <a:solidFill>
                   <a:srgbClr val="28685E"/>
                 </a:solidFill>
+                <a:latin typeface="Arial"/>
+                <a:ea typeface="Arial"/>
+                <a:cs typeface="Arial"/>
               </a:defRPr>
             </a:pPr>
             <a:r>
@@ -2423,6 +2546,9 @@
                 <a:solidFill>
                   <a:srgbClr val="28685E"/>
                 </a:solidFill>
+                <a:latin typeface="Arial"/>
+                <a:ea typeface="Arial"/>
+                <a:cs typeface="Arial"/>
               </a:rPr>
               <a:t>01</a:t>
             </a:r>
@@ -2445,8 +2571,8 @@
         </p:nvSpPr>
         <p:spPr>
           <a:xfrm xmlns:a="http://schemas.openxmlformats.org/drawingml/2006/main">
-            <a:off x="609600" y="2809875"/>
-            <a:ext cx="10668000" cy="1000125"/>
+            <a:off x="609600" y="2400300"/>
+            <a:ext cx="6191250" cy="1409700"/>
           </a:xfrm>
           <a:prstGeom xmlns:a="http://schemas.openxmlformats.org/drawingml/2006/main" prst="rect">
             <a:avLst/>
@@ -2458,21 +2584,30 @@
           </a:ln>
         </p:spPr>
         <p:txBody>
-          <a:bodyPr xmlns:a="http://schemas.openxmlformats.org/drawingml/2006/main" lIns="0" tIns="0" rIns="0" bIns="0" anchor="ctr"/>
+          <a:bodyPr xmlns:a="http://schemas.openxmlformats.org/drawingml/2006/main" wrap="square" lIns="0" tIns="0" rIns="0" bIns="0" anchor="ctr">
+            <a:noAutofit/>
+          </a:bodyPr>
           <a:lstStyle xmlns:a="http://schemas.openxmlformats.org/drawingml/2006/main"/>
           <a:p xmlns:a="http://schemas.openxmlformats.org/drawingml/2006/main">
             <a:pPr>
-              <a:defRPr sz="3900" b="1">
+              <a:buNone/>
+              <a:defRPr sz="3450" b="1">
                 <a:solidFill>
                   <a:srgbClr val="28685E"/>
                 </a:solidFill>
+                <a:latin typeface="Arial"/>
+                <a:ea typeface="Arial"/>
+                <a:cs typeface="Arial"/>
               </a:defRPr>
             </a:pPr>
             <a:r>
-              <a:rPr sz="3900" b="1">
+              <a:rPr sz="3450" b="1">
                 <a:solidFill>
                   <a:srgbClr val="28685E"/>
                 </a:solidFill>
+                <a:latin typeface="Arial"/>
+                <a:ea typeface="Arial"/>
+                <a:cs typeface="Arial"/>
               </a:rPr>
               <a:t>A different food can fit the same group.</a:t>
             </a:r>
@@ -2495,8 +2630,8 @@
         </p:nvSpPr>
         <p:spPr>
           <a:xfrm xmlns:a="http://schemas.openxmlformats.org/drawingml/2006/main">
-            <a:off x="609600" y="4143375"/>
-            <a:ext cx="10668000" cy="1143000"/>
+            <a:off x="609600" y="4286250"/>
+            <a:ext cx="6667500" cy="1314450"/>
           </a:xfrm>
           <a:prstGeom xmlns:a="http://schemas.openxmlformats.org/drawingml/2006/main" prst="rect">
             <a:avLst/>
@@ -2508,27 +2643,58 @@
           </a:ln>
         </p:spPr>
         <p:txBody>
-          <a:bodyPr xmlns:a="http://schemas.openxmlformats.org/drawingml/2006/main" lIns="0" tIns="0" rIns="0" bIns="0" anchor="ctr"/>
+          <a:bodyPr xmlns:a="http://schemas.openxmlformats.org/drawingml/2006/main" wrap="square" lIns="0" tIns="0" rIns="0" bIns="0" anchor="ctr">
+            <a:noAutofit/>
+          </a:bodyPr>
           <a:lstStyle xmlns:a="http://schemas.openxmlformats.org/drawingml/2006/main"/>
           <a:p xmlns:a="http://schemas.openxmlformats.org/drawingml/2006/main">
             <a:pPr>
-              <a:defRPr sz="2550" b="0">
+              <a:buNone/>
+              <a:defRPr sz="2400" b="0">
                 <a:solidFill>
                   <a:srgbClr val="152B3A"/>
                 </a:solidFill>
+                <a:latin typeface="Arial"/>
+                <a:ea typeface="Arial"/>
+                <a:cs typeface="Arial"/>
               </a:defRPr>
             </a:pPr>
             <a:r>
-              <a:rPr sz="2550" b="0">
+              <a:rPr sz="2400" b="0">
                 <a:solidFill>
                   <a:srgbClr val="152B3A"/>
                 </a:solidFill>
+                <a:latin typeface="Arial"/>
+                <a:ea typeface="Arial"/>
+                <a:cs typeface="Arial"/>
               </a:rPr>
               <a:t>I can justify a swap and explain the model’s limits.</a:t>
             </a:r>
           </a:p>
         </p:txBody>
       </p:sp>
+      <p:pic>
+        <p:nvPicPr>
+          <p:cNvPr id="22" name=""/>
+          <p:cNvPicPr>
+            <a:picLocks xmlns:a="http://schemas.openxmlformats.org/drawingml/2006/main" noChangeAspect="1"/>
+          </p:cNvPicPr>
+          <p:nvPr/>
+        </p:nvPicPr>
+        <p:blipFill>
+          <a:blip xmlns:r="http://schemas.openxmlformats.org/officeDocument/2006/relationships" xmlns:a="http://schemas.openxmlformats.org/drawingml/2006/main" r:embed="R2442e4e0dc3d4315"/>
+          <a:stretch xmlns:a="http://schemas.openxmlformats.org/drawingml/2006/main"/>
+        </p:blipFill>
+        <p:spPr>
+          <a:xfrm xmlns:a="http://schemas.openxmlformats.org/drawingml/2006/main">
+            <a:off x="8209598" y="2190750"/>
+            <a:ext cx="2535555" cy="3143250"/>
+          </a:xfrm>
+          <a:prstGeom xmlns:a="http://schemas.openxmlformats.org/drawingml/2006/main" prst="rect">
+            <a:avLst/>
+          </a:prstGeom>
+        </p:spPr>
+      </p:pic>
     </p:spTree>
     <p:extLst>
       <p:ext uri="{BB962C8B-B14F-4D97-AF65-F5344CB8AC3E}">
@@ -2545,7 +2711,7 @@
     <p:bg>
       <p:bgPr>
         <a:solidFill xmlns:a="http://schemas.openxmlformats.org/drawingml/2006/main">
-          <a:srgbClr val="F5F1E8"/>
+          <a:srgbClr val="FBF9F3"/>
         </a:solidFill>
       </p:bgPr>
     </p:bg>
@@ -2574,8 +2740,8 @@
         </p:nvSpPr>
         <p:spPr>
           <a:xfrm xmlns:a="http://schemas.openxmlformats.org/drawingml/2006/main">
-            <a:off x="609600" y="552450"/>
-            <a:ext cx="781050" cy="57150"/>
+            <a:off x="609600" y="742950"/>
+            <a:ext cx="9906000" cy="38100"/>
           </a:xfrm>
           <a:prstGeom xmlns:a="http://schemas.openxmlformats.org/drawingml/2006/main" prst="rect">
             <a:avLst/>
@@ -2605,8 +2771,8 @@
         </p:nvSpPr>
         <p:spPr>
           <a:xfrm xmlns:a="http://schemas.openxmlformats.org/drawingml/2006/main">
-            <a:off x="609600" y="762000"/>
-            <a:ext cx="9334500" cy="285750"/>
+            <a:off x="609600" y="342900"/>
+            <a:ext cx="9334500" cy="266700"/>
           </a:xfrm>
           <a:prstGeom xmlns:a="http://schemas.openxmlformats.org/drawingml/2006/main" prst="rect">
             <a:avLst/>
@@ -2618,21 +2784,30 @@
           </a:ln>
         </p:spPr>
         <p:txBody>
-          <a:bodyPr xmlns:a="http://schemas.openxmlformats.org/drawingml/2006/main" lIns="0" tIns="0" rIns="0" bIns="0" anchor="ctr"/>
+          <a:bodyPr xmlns:a="http://schemas.openxmlformats.org/drawingml/2006/main" wrap="square" lIns="0" tIns="0" rIns="0" bIns="0" anchor="ctr">
+            <a:noAutofit/>
+          </a:bodyPr>
           <a:lstStyle xmlns:a="http://schemas.openxmlformats.org/drawingml/2006/main"/>
           <a:p xmlns:a="http://schemas.openxmlformats.org/drawingml/2006/main">
             <a:pPr>
-              <a:defRPr sz="1500" b="1">
+              <a:buNone/>
+              <a:defRPr sz="1425" b="1">
                 <a:solidFill>
                   <a:srgbClr val="28685E"/>
                 </a:solidFill>
+                <a:latin typeface="Arial"/>
+                <a:ea typeface="Arial"/>
+                <a:cs typeface="Arial"/>
               </a:defRPr>
             </a:pPr>
             <a:r>
-              <a:rPr sz="1500" b="1">
+              <a:rPr sz="1425" b="1">
                 <a:solidFill>
                   <a:srgbClr val="28685E"/>
                 </a:solidFill>
+                <a:latin typeface="Arial"/>
+                <a:ea typeface="Arial"/>
+                <a:cs typeface="Arial"/>
               </a:rPr>
               <a:t>MADE BY MATT  /  BUILD SCIENCE</a:t>
             </a:r>
@@ -2641,14 +2816,14 @@
       </p:sp>
       <p:pic>
         <p:nvPicPr>
-          <p:cNvPr id="13" name=""/>
+          <p:cNvPr id="15" name=""/>
           <p:cNvPicPr>
             <a:picLocks xmlns:a="http://schemas.openxmlformats.org/drawingml/2006/main" noChangeAspect="1"/>
           </p:cNvPicPr>
           <p:nvPr/>
         </p:nvPicPr>
         <p:blipFill>
-          <a:blip xmlns:r="http://schemas.openxmlformats.org/officeDocument/2006/relationships" xmlns:a="http://schemas.openxmlformats.org/drawingml/2006/main" r:embed="R8bb1051855474664"/>
+          <a:blip xmlns:r="http://schemas.openxmlformats.org/officeDocument/2006/relationships" xmlns:a="http://schemas.openxmlformats.org/drawingml/2006/main" r:embed="Recb8baa13adb48cd"/>
           <a:stretch xmlns:a="http://schemas.openxmlformats.org/drawingml/2006/main"/>
         </p:blipFill>
         <p:spPr>
@@ -2677,8 +2852,8 @@
         </p:nvSpPr>
         <p:spPr>
           <a:xfrm xmlns:a="http://schemas.openxmlformats.org/drawingml/2006/main">
-            <a:off x="609600" y="1352550"/>
-            <a:ext cx="10972800" cy="952500"/>
+            <a:off x="609600" y="1047750"/>
+            <a:ext cx="10972800" cy="895350"/>
           </a:xfrm>
           <a:prstGeom xmlns:a="http://schemas.openxmlformats.org/drawingml/2006/main" prst="rect">
             <a:avLst/>
@@ -2690,21 +2865,30 @@
           </a:ln>
         </p:spPr>
         <p:txBody>
-          <a:bodyPr xmlns:a="http://schemas.openxmlformats.org/drawingml/2006/main" lIns="0" tIns="0" rIns="0" bIns="0" anchor="ctr"/>
+          <a:bodyPr xmlns:a="http://schemas.openxmlformats.org/drawingml/2006/main" wrap="square" lIns="0" tIns="0" rIns="0" bIns="0" anchor="ctr">
+            <a:noAutofit/>
+          </a:bodyPr>
           <a:lstStyle xmlns:a="http://schemas.openxmlformats.org/drawingml/2006/main"/>
           <a:p xmlns:a="http://schemas.openxmlformats.org/drawingml/2006/main">
             <a:pPr>
-              <a:defRPr sz="3750" b="1">
+              <a:buNone/>
+              <a:defRPr sz="3600" b="1">
                 <a:solidFill>
                   <a:srgbClr val="152B3A"/>
                 </a:solidFill>
+                <a:latin typeface="Arial"/>
+                <a:ea typeface="Arial"/>
+                <a:cs typeface="Arial"/>
               </a:defRPr>
             </a:pPr>
             <a:r>
-              <a:rPr sz="3750" b="1">
+              <a:rPr sz="3600" b="1">
                 <a:solidFill>
                   <a:srgbClr val="152B3A"/>
                 </a:solidFill>
+                <a:latin typeface="Arial"/>
+                <a:ea typeface="Arial"/>
+                <a:cs typeface="Arial"/>
               </a:rPr>
               <a:t>What stays the same after a swap?</a:t>
             </a:r>
@@ -2771,21 +2955,30 @@
           </a:ln>
         </p:spPr>
         <p:txBody>
-          <a:bodyPr xmlns:a="http://schemas.openxmlformats.org/drawingml/2006/main" lIns="0" tIns="0" rIns="0" bIns="0" anchor="ctr"/>
+          <a:bodyPr xmlns:a="http://schemas.openxmlformats.org/drawingml/2006/main" wrap="square" lIns="0" tIns="0" rIns="0" bIns="0" anchor="ctr">
+            <a:noAutofit/>
+          </a:bodyPr>
           <a:lstStyle xmlns:a="http://schemas.openxmlformats.org/drawingml/2006/main"/>
           <a:p xmlns:a="http://schemas.openxmlformats.org/drawingml/2006/main">
             <a:pPr>
-              <a:defRPr sz="1275" b="0">
+              <a:buNone/>
+              <a:defRPr sz="1200" b="0">
                 <a:solidFill>
                   <a:srgbClr val="50616B"/>
                 </a:solidFill>
+                <a:latin typeface="Arial"/>
+                <a:ea typeface="Arial"/>
+                <a:cs typeface="Arial"/>
               </a:defRPr>
             </a:pPr>
             <a:r>
-              <a:rPr sz="1275" b="0">
+              <a:rPr sz="1200" b="0">
                 <a:solidFill>
                   <a:srgbClr val="50616B"/>
                 </a:solidFill>
+                <a:latin typeface="Arial"/>
+                <a:ea typeface="Arial"/>
+                <a:cs typeface="Arial"/>
               </a:rPr>
               <a:t>AUTUMN 1  ·  WEEK 6  ·  LESSON B</a:t>
             </a:r>
@@ -2821,14 +3014,20 @@
           </a:ln>
         </p:spPr>
         <p:txBody>
-          <a:bodyPr xmlns:a="http://schemas.openxmlformats.org/drawingml/2006/main" lIns="0" tIns="0" rIns="0" bIns="0" anchor="ctr"/>
+          <a:bodyPr xmlns:a="http://schemas.openxmlformats.org/drawingml/2006/main" wrap="square" lIns="0" tIns="0" rIns="0" bIns="0" anchor="ctr">
+            <a:noAutofit/>
+          </a:bodyPr>
           <a:lstStyle xmlns:a="http://schemas.openxmlformats.org/drawingml/2006/main"/>
           <a:p xmlns:a="http://schemas.openxmlformats.org/drawingml/2006/main">
             <a:pPr>
+              <a:buNone/>
               <a:defRPr sz="1350" b="1">
                 <a:solidFill>
                   <a:srgbClr val="28685E"/>
                 </a:solidFill>
+                <a:latin typeface="Arial"/>
+                <a:ea typeface="Arial"/>
+                <a:cs typeface="Arial"/>
               </a:defRPr>
             </a:pPr>
             <a:r>
@@ -2836,6 +3035,9 @@
                 <a:solidFill>
                   <a:srgbClr val="28685E"/>
                 </a:solidFill>
+                <a:latin typeface="Arial"/>
+                <a:ea typeface="Arial"/>
+                <a:cs typeface="Arial"/>
               </a:rPr>
               <a:t>10</a:t>
             </a:r>
@@ -2858,8 +3060,8 @@
         </p:nvSpPr>
         <p:spPr>
           <a:xfrm xmlns:a="http://schemas.openxmlformats.org/drawingml/2006/main">
-            <a:off x="609600" y="2619375"/>
-            <a:ext cx="10972800" cy="781050"/>
+            <a:off x="609600" y="2305050"/>
+            <a:ext cx="10972800" cy="914400"/>
           </a:xfrm>
           <a:prstGeom xmlns:a="http://schemas.openxmlformats.org/drawingml/2006/main" prst="rect">
             <a:avLst/>
@@ -2871,14 +3073,20 @@
           </a:ln>
         </p:spPr>
         <p:txBody>
-          <a:bodyPr xmlns:a="http://schemas.openxmlformats.org/drawingml/2006/main" lIns="0" tIns="0" rIns="0" bIns="0" anchor="ctr"/>
+          <a:bodyPr xmlns:a="http://schemas.openxmlformats.org/drawingml/2006/main" wrap="square" lIns="0" tIns="0" rIns="0" bIns="0" anchor="ctr">
+            <a:noAutofit/>
+          </a:bodyPr>
           <a:lstStyle xmlns:a="http://schemas.openxmlformats.org/drawingml/2006/main"/>
           <a:p xmlns:a="http://schemas.openxmlformats.org/drawingml/2006/main">
             <a:pPr>
+              <a:buNone/>
               <a:defRPr sz="2550" b="0">
                 <a:solidFill>
                   <a:srgbClr val="152B3A"/>
                 </a:solidFill>
+                <a:latin typeface="Arial"/>
+                <a:ea typeface="Arial"/>
+                <a:cs typeface="Arial"/>
               </a:defRPr>
             </a:pPr>
             <a:r>
@@ -2886,6 +3094,9 @@
                 <a:solidFill>
                   <a:srgbClr val="152B3A"/>
                 </a:solidFill>
+                <a:latin typeface="Arial"/>
+                <a:ea typeface="Arial"/>
+                <a:cs typeface="Arial"/>
               </a:rPr>
               <a:t>Supported: name a food in the protein group.</a:t>
             </a:r>
@@ -2908,8 +3119,8 @@
         </p:nvSpPr>
         <p:spPr>
           <a:xfrm xmlns:a="http://schemas.openxmlformats.org/drawingml/2006/main">
-            <a:off x="609600" y="3476625"/>
-            <a:ext cx="10972800" cy="781050"/>
+            <a:off x="609600" y="3352800"/>
+            <a:ext cx="10972800" cy="914400"/>
           </a:xfrm>
           <a:prstGeom xmlns:a="http://schemas.openxmlformats.org/drawingml/2006/main" prst="rect">
             <a:avLst/>
@@ -2921,14 +3132,20 @@
           </a:ln>
         </p:spPr>
         <p:txBody>
-          <a:bodyPr xmlns:a="http://schemas.openxmlformats.org/drawingml/2006/main" lIns="0" tIns="0" rIns="0" bIns="0" anchor="ctr"/>
+          <a:bodyPr xmlns:a="http://schemas.openxmlformats.org/drawingml/2006/main" wrap="square" lIns="0" tIns="0" rIns="0" bIns="0" anchor="ctr">
+            <a:noAutofit/>
+          </a:bodyPr>
           <a:lstStyle xmlns:a="http://schemas.openxmlformats.org/drawingml/2006/main"/>
           <a:p xmlns:a="http://schemas.openxmlformats.org/drawingml/2006/main">
             <a:pPr>
+              <a:buNone/>
               <a:defRPr sz="2550" b="0">
                 <a:solidFill>
                   <a:srgbClr val="152B3A"/>
                 </a:solidFill>
+                <a:latin typeface="Arial"/>
+                <a:ea typeface="Arial"/>
+                <a:cs typeface="Arial"/>
               </a:defRPr>
             </a:pPr>
             <a:r>
@@ -2936,6 +3153,9 @@
                 <a:solidFill>
                   <a:srgbClr val="152B3A"/>
                 </a:solidFill>
+                <a:latin typeface="Arial"/>
+                <a:ea typeface="Arial"/>
+                <a:cs typeface="Arial"/>
               </a:rPr>
               <a:t>Standard: explain the chicken-to-beans swap.</a:t>
             </a:r>
@@ -2958,8 +3178,8 @@
         </p:nvSpPr>
         <p:spPr>
           <a:xfrm xmlns:a="http://schemas.openxmlformats.org/drawingml/2006/main">
-            <a:off x="609600" y="4333875"/>
-            <a:ext cx="10972800" cy="781050"/>
+            <a:off x="609600" y="4400550"/>
+            <a:ext cx="10972800" cy="914400"/>
           </a:xfrm>
           <a:prstGeom xmlns:a="http://schemas.openxmlformats.org/drawingml/2006/main" prst="rect">
             <a:avLst/>
@@ -2971,21 +3191,30 @@
           </a:ln>
         </p:spPr>
         <p:txBody>
-          <a:bodyPr xmlns:a="http://schemas.openxmlformats.org/drawingml/2006/main" lIns="0" tIns="0" rIns="0" bIns="0" anchor="ctr"/>
+          <a:bodyPr xmlns:a="http://schemas.openxmlformats.org/drawingml/2006/main" wrap="square" lIns="0" tIns="0" rIns="0" bIns="0" anchor="ctr">
+            <a:noAutofit/>
+          </a:bodyPr>
           <a:lstStyle xmlns:a="http://schemas.openxmlformats.org/drawingml/2006/main"/>
           <a:p xmlns:a="http://schemas.openxmlformats.org/drawingml/2006/main">
             <a:pPr>
-              <a:defRPr sz="2550" b="0">
-                <a:solidFill>
-                  <a:srgbClr val="152B3A"/>
-                </a:solidFill>
+              <a:buNone/>
+              <a:defRPr sz="2550" b="1">
+                <a:solidFill>
+                  <a:srgbClr val="28685E"/>
+                </a:solidFill>
+                <a:latin typeface="Arial"/>
+                <a:ea typeface="Arial"/>
+                <a:cs typeface="Arial"/>
               </a:defRPr>
             </a:pPr>
             <a:r>
-              <a:rPr sz="2550" b="0">
-                <a:solidFill>
-                  <a:srgbClr val="152B3A"/>
-                </a:solidFill>
+              <a:rPr sz="2550" b="1">
+                <a:solidFill>
+                  <a:srgbClr val="28685E"/>
+                </a:solidFill>
+                <a:latin typeface="Arial"/>
+                <a:ea typeface="Arial"/>
+                <a:cs typeface="Arial"/>
               </a:rPr>
               <a:t>Stretch: why can’t one plate show all needs?</a:t>
             </a:r>
@@ -3008,7 +3237,7 @@
     <p:bg>
       <p:bgPr>
         <a:solidFill xmlns:a="http://schemas.openxmlformats.org/drawingml/2006/main">
-          <a:srgbClr val="F5F1E8"/>
+          <a:srgbClr val="FBF9F3"/>
         </a:solidFill>
       </p:bgPr>
     </p:bg>
@@ -3037,8 +3266,8 @@
         </p:nvSpPr>
         <p:spPr>
           <a:xfrm xmlns:a="http://schemas.openxmlformats.org/drawingml/2006/main">
-            <a:off x="609600" y="552450"/>
-            <a:ext cx="781050" cy="57150"/>
+            <a:off x="609600" y="742950"/>
+            <a:ext cx="9906000" cy="38100"/>
           </a:xfrm>
           <a:prstGeom xmlns:a="http://schemas.openxmlformats.org/drawingml/2006/main" prst="rect">
             <a:avLst/>
@@ -3068,8 +3297,8 @@
         </p:nvSpPr>
         <p:spPr>
           <a:xfrm xmlns:a="http://schemas.openxmlformats.org/drawingml/2006/main">
-            <a:off x="609600" y="762000"/>
-            <a:ext cx="9334500" cy="285750"/>
+            <a:off x="609600" y="342900"/>
+            <a:ext cx="9334500" cy="266700"/>
           </a:xfrm>
           <a:prstGeom xmlns:a="http://schemas.openxmlformats.org/drawingml/2006/main" prst="rect">
             <a:avLst/>
@@ -3081,21 +3310,30 @@
           </a:ln>
         </p:spPr>
         <p:txBody>
-          <a:bodyPr xmlns:a="http://schemas.openxmlformats.org/drawingml/2006/main" lIns="0" tIns="0" rIns="0" bIns="0" anchor="ctr"/>
+          <a:bodyPr xmlns:a="http://schemas.openxmlformats.org/drawingml/2006/main" wrap="square" lIns="0" tIns="0" rIns="0" bIns="0" anchor="ctr">
+            <a:noAutofit/>
+          </a:bodyPr>
           <a:lstStyle xmlns:a="http://schemas.openxmlformats.org/drawingml/2006/main"/>
           <a:p xmlns:a="http://schemas.openxmlformats.org/drawingml/2006/main">
             <a:pPr>
-              <a:defRPr sz="1500" b="1">
+              <a:buNone/>
+              <a:defRPr sz="1425" b="1">
                 <a:solidFill>
                   <a:srgbClr val="28685E"/>
                 </a:solidFill>
+                <a:latin typeface="Arial"/>
+                <a:ea typeface="Arial"/>
+                <a:cs typeface="Arial"/>
               </a:defRPr>
             </a:pPr>
             <a:r>
-              <a:rPr sz="1500" b="1">
+              <a:rPr sz="1425" b="1">
                 <a:solidFill>
                   <a:srgbClr val="28685E"/>
                 </a:solidFill>
+                <a:latin typeface="Arial"/>
+                <a:ea typeface="Arial"/>
+                <a:cs typeface="Arial"/>
               </a:rPr>
               <a:t>MADE BY MATT  /  BUILD SCIENCE</a:t>
             </a:r>
@@ -3104,14 +3342,14 @@
       </p:sp>
       <p:pic>
         <p:nvPicPr>
-          <p:cNvPr id="13" name=""/>
+          <p:cNvPr id="15" name=""/>
           <p:cNvPicPr>
             <a:picLocks xmlns:a="http://schemas.openxmlformats.org/drawingml/2006/main" noChangeAspect="1"/>
           </p:cNvPicPr>
           <p:nvPr/>
         </p:nvPicPr>
         <p:blipFill>
-          <a:blip xmlns:r="http://schemas.openxmlformats.org/officeDocument/2006/relationships" xmlns:a="http://schemas.openxmlformats.org/drawingml/2006/main" r:embed="R30950c6d4b3240ac"/>
+          <a:blip xmlns:r="http://schemas.openxmlformats.org/officeDocument/2006/relationships" xmlns:a="http://schemas.openxmlformats.org/drawingml/2006/main" r:embed="R8ee2e4a45f724928"/>
           <a:stretch xmlns:a="http://schemas.openxmlformats.org/drawingml/2006/main"/>
         </p:blipFill>
         <p:spPr>
@@ -3140,8 +3378,8 @@
         </p:nvSpPr>
         <p:spPr>
           <a:xfrm xmlns:a="http://schemas.openxmlformats.org/drawingml/2006/main">
-            <a:off x="609600" y="1352550"/>
-            <a:ext cx="10972800" cy="952500"/>
+            <a:off x="609600" y="1047750"/>
+            <a:ext cx="10972800" cy="895350"/>
           </a:xfrm>
           <a:prstGeom xmlns:a="http://schemas.openxmlformats.org/drawingml/2006/main" prst="rect">
             <a:avLst/>
@@ -3153,21 +3391,30 @@
           </a:ln>
         </p:spPr>
         <p:txBody>
-          <a:bodyPr xmlns:a="http://schemas.openxmlformats.org/drawingml/2006/main" lIns="0" tIns="0" rIns="0" bIns="0" anchor="ctr"/>
+          <a:bodyPr xmlns:a="http://schemas.openxmlformats.org/drawingml/2006/main" wrap="square" lIns="0" tIns="0" rIns="0" bIns="0" anchor="ctr">
+            <a:noAutofit/>
+          </a:bodyPr>
           <a:lstStyle xmlns:a="http://schemas.openxmlformats.org/drawingml/2006/main"/>
           <a:p xmlns:a="http://schemas.openxmlformats.org/drawingml/2006/main">
             <a:pPr>
-              <a:defRPr sz="3750" b="1">
+              <a:buNone/>
+              <a:defRPr sz="3600" b="1">
                 <a:solidFill>
                   <a:srgbClr val="152B3A"/>
                 </a:solidFill>
+                <a:latin typeface="Arial"/>
+                <a:ea typeface="Arial"/>
+                <a:cs typeface="Arial"/>
               </a:defRPr>
             </a:pPr>
             <a:r>
-              <a:rPr sz="3750" b="1">
+              <a:rPr sz="3600" b="1">
                 <a:solidFill>
                   <a:srgbClr val="152B3A"/>
                 </a:solidFill>
+                <a:latin typeface="Arial"/>
+                <a:ea typeface="Arial"/>
+                <a:cs typeface="Arial"/>
               </a:rPr>
               <a:t>Return to your labelled groups</a:t>
             </a:r>
@@ -3234,21 +3481,30 @@
           </a:ln>
         </p:spPr>
         <p:txBody>
-          <a:bodyPr xmlns:a="http://schemas.openxmlformats.org/drawingml/2006/main" lIns="0" tIns="0" rIns="0" bIns="0" anchor="ctr"/>
+          <a:bodyPr xmlns:a="http://schemas.openxmlformats.org/drawingml/2006/main" wrap="square" lIns="0" tIns="0" rIns="0" bIns="0" anchor="ctr">
+            <a:noAutofit/>
+          </a:bodyPr>
           <a:lstStyle xmlns:a="http://schemas.openxmlformats.org/drawingml/2006/main"/>
           <a:p xmlns:a="http://schemas.openxmlformats.org/drawingml/2006/main">
             <a:pPr>
-              <a:defRPr sz="1275" b="0">
+              <a:buNone/>
+              <a:defRPr sz="1200" b="0">
                 <a:solidFill>
                   <a:srgbClr val="50616B"/>
                 </a:solidFill>
+                <a:latin typeface="Arial"/>
+                <a:ea typeface="Arial"/>
+                <a:cs typeface="Arial"/>
               </a:defRPr>
             </a:pPr>
             <a:r>
-              <a:rPr sz="1275" b="0">
+              <a:rPr sz="1200" b="0">
                 <a:solidFill>
                   <a:srgbClr val="50616B"/>
                 </a:solidFill>
+                <a:latin typeface="Arial"/>
+                <a:ea typeface="Arial"/>
+                <a:cs typeface="Arial"/>
               </a:rPr>
               <a:t>AUTUMN 1  ·  WEEK 6  ·  LESSON B</a:t>
             </a:r>
@@ -3284,14 +3540,20 @@
           </a:ln>
         </p:spPr>
         <p:txBody>
-          <a:bodyPr xmlns:a="http://schemas.openxmlformats.org/drawingml/2006/main" lIns="0" tIns="0" rIns="0" bIns="0" anchor="ctr"/>
+          <a:bodyPr xmlns:a="http://schemas.openxmlformats.org/drawingml/2006/main" wrap="square" lIns="0" tIns="0" rIns="0" bIns="0" anchor="ctr">
+            <a:noAutofit/>
+          </a:bodyPr>
           <a:lstStyle xmlns:a="http://schemas.openxmlformats.org/drawingml/2006/main"/>
           <a:p xmlns:a="http://schemas.openxmlformats.org/drawingml/2006/main">
             <a:pPr>
+              <a:buNone/>
               <a:defRPr sz="1350" b="1">
                 <a:solidFill>
                   <a:srgbClr val="28685E"/>
                 </a:solidFill>
+                <a:latin typeface="Arial"/>
+                <a:ea typeface="Arial"/>
+                <a:cs typeface="Arial"/>
               </a:defRPr>
             </a:pPr>
             <a:r>
@@ -3299,6 +3561,9 @@
                 <a:solidFill>
                   <a:srgbClr val="28685E"/>
                 </a:solidFill>
+                <a:latin typeface="Arial"/>
+                <a:ea typeface="Arial"/>
+                <a:cs typeface="Arial"/>
               </a:rPr>
               <a:t>02</a:t>
             </a:r>
@@ -3321,8 +3586,8 @@
         </p:nvSpPr>
         <p:spPr>
           <a:xfrm xmlns:a="http://schemas.openxmlformats.org/drawingml/2006/main">
-            <a:off x="609600" y="2619375"/>
-            <a:ext cx="10972800" cy="781050"/>
+            <a:off x="609600" y="2305050"/>
+            <a:ext cx="10972800" cy="914400"/>
           </a:xfrm>
           <a:prstGeom xmlns:a="http://schemas.openxmlformats.org/drawingml/2006/main" prst="rect">
             <a:avLst/>
@@ -3334,14 +3599,20 @@
           </a:ln>
         </p:spPr>
         <p:txBody>
-          <a:bodyPr xmlns:a="http://schemas.openxmlformats.org/drawingml/2006/main" lIns="0" tIns="0" rIns="0" bIns="0" anchor="ctr"/>
+          <a:bodyPr xmlns:a="http://schemas.openxmlformats.org/drawingml/2006/main" wrap="square" lIns="0" tIns="0" rIns="0" bIns="0" anchor="ctr">
+            <a:noAutofit/>
+          </a:bodyPr>
           <a:lstStyle xmlns:a="http://schemas.openxmlformats.org/drawingml/2006/main"/>
           <a:p xmlns:a="http://schemas.openxmlformats.org/drawingml/2006/main">
             <a:pPr>
+              <a:buNone/>
               <a:defRPr sz="2550" b="0">
                 <a:solidFill>
                   <a:srgbClr val="152B3A"/>
                 </a:solidFill>
+                <a:latin typeface="Arial"/>
+                <a:ea typeface="Arial"/>
+                <a:cs typeface="Arial"/>
               </a:defRPr>
             </a:pPr>
             <a:r>
@@ -3349,6 +3620,9 @@
                 <a:solidFill>
                   <a:srgbClr val="152B3A"/>
                 </a:solidFill>
+                <a:latin typeface="Arial"/>
+                <a:ea typeface="Arial"/>
+                <a:cs typeface="Arial"/>
               </a:rPr>
               <a:t>Find Monday’s group labels and cards.</a:t>
             </a:r>
@@ -3371,8 +3645,8 @@
         </p:nvSpPr>
         <p:spPr>
           <a:xfrm xmlns:a="http://schemas.openxmlformats.org/drawingml/2006/main">
-            <a:off x="609600" y="3476625"/>
-            <a:ext cx="10972800" cy="781050"/>
+            <a:off x="609600" y="3352800"/>
+            <a:ext cx="10972800" cy="914400"/>
           </a:xfrm>
           <a:prstGeom xmlns:a="http://schemas.openxmlformats.org/drawingml/2006/main" prst="rect">
             <a:avLst/>
@@ -3384,14 +3658,20 @@
           </a:ln>
         </p:spPr>
         <p:txBody>
-          <a:bodyPr xmlns:a="http://schemas.openxmlformats.org/drawingml/2006/main" lIns="0" tIns="0" rIns="0" bIns="0" anchor="ctr"/>
+          <a:bodyPr xmlns:a="http://schemas.openxmlformats.org/drawingml/2006/main" wrap="square" lIns="0" tIns="0" rIns="0" bIns="0" anchor="ctr">
+            <a:noAutofit/>
+          </a:bodyPr>
           <a:lstStyle xmlns:a="http://schemas.openxmlformats.org/drawingml/2006/main"/>
           <a:p xmlns:a="http://schemas.openxmlformats.org/drawingml/2006/main">
             <a:pPr>
+              <a:buNone/>
               <a:defRPr sz="2550" b="0">
                 <a:solidFill>
                   <a:srgbClr val="152B3A"/>
                 </a:solidFill>
+                <a:latin typeface="Arial"/>
+                <a:ea typeface="Arial"/>
+                <a:cs typeface="Arial"/>
               </a:defRPr>
             </a:pPr>
             <a:r>
@@ -3399,6 +3679,9 @@
                 <a:solidFill>
                   <a:srgbClr val="152B3A"/>
                 </a:solidFill>
+                <a:latin typeface="Arial"/>
+                <a:ea typeface="Arial"/>
+                <a:cs typeface="Arial"/>
               </a:rPr>
               <a:t>Name or point to the five broad groups.</a:t>
             </a:r>
@@ -3421,8 +3704,8 @@
         </p:nvSpPr>
         <p:spPr>
           <a:xfrm xmlns:a="http://schemas.openxmlformats.org/drawingml/2006/main">
-            <a:off x="609600" y="4333875"/>
-            <a:ext cx="10972800" cy="781050"/>
+            <a:off x="609600" y="4400550"/>
+            <a:ext cx="10972800" cy="914400"/>
           </a:xfrm>
           <a:prstGeom xmlns:a="http://schemas.openxmlformats.org/drawingml/2006/main" prst="rect">
             <a:avLst/>
@@ -3434,21 +3717,30 @@
           </a:ln>
         </p:spPr>
         <p:txBody>
-          <a:bodyPr xmlns:a="http://schemas.openxmlformats.org/drawingml/2006/main" lIns="0" tIns="0" rIns="0" bIns="0" anchor="ctr"/>
+          <a:bodyPr xmlns:a="http://schemas.openxmlformats.org/drawingml/2006/main" wrap="square" lIns="0" tIns="0" rIns="0" bIns="0" anchor="ctr">
+            <a:noAutofit/>
+          </a:bodyPr>
           <a:lstStyle xmlns:a="http://schemas.openxmlformats.org/drawingml/2006/main"/>
           <a:p xmlns:a="http://schemas.openxmlformats.org/drawingml/2006/main">
             <a:pPr>
-              <a:defRPr sz="2550" b="0">
-                <a:solidFill>
-                  <a:srgbClr val="152B3A"/>
-                </a:solidFill>
+              <a:buNone/>
+              <a:defRPr sz="2550" b="1">
+                <a:solidFill>
+                  <a:srgbClr val="28685E"/>
+                </a:solidFill>
+                <a:latin typeface="Arial"/>
+                <a:ea typeface="Arial"/>
+                <a:cs typeface="Arial"/>
               </a:defRPr>
             </a:pPr>
             <a:r>
-              <a:rPr sz="2550" b="0">
-                <a:solidFill>
-                  <a:srgbClr val="152B3A"/>
-                </a:solidFill>
+              <a:rPr sz="2550" b="1">
+                <a:solidFill>
+                  <a:srgbClr val="28685E"/>
+                </a:solidFill>
+                <a:latin typeface="Arial"/>
+                <a:ea typeface="Arial"/>
+                <a:cs typeface="Arial"/>
               </a:rPr>
               <a:t>Choose: move, draw, label or direct.</a:t>
             </a:r>
@@ -3471,7 +3763,7 @@
     <p:bg>
       <p:bgPr>
         <a:solidFill xmlns:a="http://schemas.openxmlformats.org/drawingml/2006/main">
-          <a:srgbClr val="F5F1E8"/>
+          <a:srgbClr val="FBF9F3"/>
         </a:solidFill>
       </p:bgPr>
     </p:bg>
@@ -3500,8 +3792,8 @@
         </p:nvSpPr>
         <p:spPr>
           <a:xfrm xmlns:a="http://schemas.openxmlformats.org/drawingml/2006/main">
-            <a:off x="609600" y="552450"/>
-            <a:ext cx="781050" cy="57150"/>
+            <a:off x="609600" y="742950"/>
+            <a:ext cx="9906000" cy="38100"/>
           </a:xfrm>
           <a:prstGeom xmlns:a="http://schemas.openxmlformats.org/drawingml/2006/main" prst="rect">
             <a:avLst/>
@@ -3531,8 +3823,8 @@
         </p:nvSpPr>
         <p:spPr>
           <a:xfrm xmlns:a="http://schemas.openxmlformats.org/drawingml/2006/main">
-            <a:off x="609600" y="762000"/>
-            <a:ext cx="9334500" cy="285750"/>
+            <a:off x="609600" y="342900"/>
+            <a:ext cx="9334500" cy="266700"/>
           </a:xfrm>
           <a:prstGeom xmlns:a="http://schemas.openxmlformats.org/drawingml/2006/main" prst="rect">
             <a:avLst/>
@@ -3544,21 +3836,30 @@
           </a:ln>
         </p:spPr>
         <p:txBody>
-          <a:bodyPr xmlns:a="http://schemas.openxmlformats.org/drawingml/2006/main" lIns="0" tIns="0" rIns="0" bIns="0" anchor="ctr"/>
+          <a:bodyPr xmlns:a="http://schemas.openxmlformats.org/drawingml/2006/main" wrap="square" lIns="0" tIns="0" rIns="0" bIns="0" anchor="ctr">
+            <a:noAutofit/>
+          </a:bodyPr>
           <a:lstStyle xmlns:a="http://schemas.openxmlformats.org/drawingml/2006/main"/>
           <a:p xmlns:a="http://schemas.openxmlformats.org/drawingml/2006/main">
             <a:pPr>
-              <a:defRPr sz="1500" b="1">
+              <a:buNone/>
+              <a:defRPr sz="1425" b="1">
                 <a:solidFill>
                   <a:srgbClr val="28685E"/>
                 </a:solidFill>
+                <a:latin typeface="Arial"/>
+                <a:ea typeface="Arial"/>
+                <a:cs typeface="Arial"/>
               </a:defRPr>
             </a:pPr>
             <a:r>
-              <a:rPr sz="1500" b="1">
+              <a:rPr sz="1425" b="1">
                 <a:solidFill>
                   <a:srgbClr val="28685E"/>
                 </a:solidFill>
+                <a:latin typeface="Arial"/>
+                <a:ea typeface="Arial"/>
+                <a:cs typeface="Arial"/>
               </a:rPr>
               <a:t>MADE BY MATT  /  BUILD SCIENCE</a:t>
             </a:r>
@@ -3567,14 +3868,14 @@
       </p:sp>
       <p:pic>
         <p:nvPicPr>
-          <p:cNvPr id="14" name=""/>
+          <p:cNvPr id="16" name=""/>
           <p:cNvPicPr>
             <a:picLocks xmlns:a="http://schemas.openxmlformats.org/drawingml/2006/main" noChangeAspect="1"/>
           </p:cNvPicPr>
           <p:nvPr/>
         </p:nvPicPr>
         <p:blipFill>
-          <a:blip xmlns:r="http://schemas.openxmlformats.org/officeDocument/2006/relationships" xmlns:a="http://schemas.openxmlformats.org/drawingml/2006/main" r:embed="Re4189ac6e23f40bf"/>
+          <a:blip xmlns:r="http://schemas.openxmlformats.org/officeDocument/2006/relationships" xmlns:a="http://schemas.openxmlformats.org/drawingml/2006/main" r:embed="R0780f26d19bb451a"/>
           <a:stretch xmlns:a="http://schemas.openxmlformats.org/drawingml/2006/main"/>
         </p:blipFill>
         <p:spPr>
@@ -3603,8 +3904,8 @@
         </p:nvSpPr>
         <p:spPr>
           <a:xfrm xmlns:a="http://schemas.openxmlformats.org/drawingml/2006/main">
-            <a:off x="609600" y="1352550"/>
-            <a:ext cx="10972800" cy="952500"/>
+            <a:off x="609600" y="1047750"/>
+            <a:ext cx="10972800" cy="895350"/>
           </a:xfrm>
           <a:prstGeom xmlns:a="http://schemas.openxmlformats.org/drawingml/2006/main" prst="rect">
             <a:avLst/>
@@ -3616,21 +3917,30 @@
           </a:ln>
         </p:spPr>
         <p:txBody>
-          <a:bodyPr xmlns:a="http://schemas.openxmlformats.org/drawingml/2006/main" lIns="0" tIns="0" rIns="0" bIns="0" anchor="ctr"/>
+          <a:bodyPr xmlns:a="http://schemas.openxmlformats.org/drawingml/2006/main" wrap="square" lIns="0" tIns="0" rIns="0" bIns="0" anchor="ctr">
+            <a:noAutofit/>
+          </a:bodyPr>
           <a:lstStyle xmlns:a="http://schemas.openxmlformats.org/drawingml/2006/main"/>
           <a:p xmlns:a="http://schemas.openxmlformats.org/drawingml/2006/main">
             <a:pPr>
-              <a:defRPr sz="3750" b="1">
+              <a:buNone/>
+              <a:defRPr sz="3600" b="1">
                 <a:solidFill>
                   <a:srgbClr val="152B3A"/>
                 </a:solidFill>
+                <a:latin typeface="Arial"/>
+                <a:ea typeface="Arial"/>
+                <a:cs typeface="Arial"/>
               </a:defRPr>
             </a:pPr>
             <a:r>
-              <a:rPr sz="3750" b="1">
+              <a:rPr sz="3600" b="1">
                 <a:solidFill>
                   <a:srgbClr val="152B3A"/>
                 </a:solidFill>
+                <a:latin typeface="Arial"/>
+                <a:ea typeface="Arial"/>
+                <a:cs typeface="Arial"/>
               </a:rPr>
               <a:t>Case A: group the four foods</a:t>
             </a:r>
@@ -3697,21 +4007,30 @@
           </a:ln>
         </p:spPr>
         <p:txBody>
-          <a:bodyPr xmlns:a="http://schemas.openxmlformats.org/drawingml/2006/main" lIns="0" tIns="0" rIns="0" bIns="0" anchor="ctr"/>
+          <a:bodyPr xmlns:a="http://schemas.openxmlformats.org/drawingml/2006/main" wrap="square" lIns="0" tIns="0" rIns="0" bIns="0" anchor="ctr">
+            <a:noAutofit/>
+          </a:bodyPr>
           <a:lstStyle xmlns:a="http://schemas.openxmlformats.org/drawingml/2006/main"/>
           <a:p xmlns:a="http://schemas.openxmlformats.org/drawingml/2006/main">
             <a:pPr>
-              <a:defRPr sz="1275" b="0">
+              <a:buNone/>
+              <a:defRPr sz="1200" b="0">
                 <a:solidFill>
                   <a:srgbClr val="50616B"/>
                 </a:solidFill>
+                <a:latin typeface="Arial"/>
+                <a:ea typeface="Arial"/>
+                <a:cs typeface="Arial"/>
               </a:defRPr>
             </a:pPr>
             <a:r>
-              <a:rPr sz="1275" b="0">
+              <a:rPr sz="1200" b="0">
                 <a:solidFill>
                   <a:srgbClr val="50616B"/>
                 </a:solidFill>
+                <a:latin typeface="Arial"/>
+                <a:ea typeface="Arial"/>
+                <a:cs typeface="Arial"/>
               </a:rPr>
               <a:t>AUTUMN 1  ·  WEEK 6  ·  LESSON B</a:t>
             </a:r>
@@ -3747,14 +4066,20 @@
           </a:ln>
         </p:spPr>
         <p:txBody>
-          <a:bodyPr xmlns:a="http://schemas.openxmlformats.org/drawingml/2006/main" lIns="0" tIns="0" rIns="0" bIns="0" anchor="ctr"/>
+          <a:bodyPr xmlns:a="http://schemas.openxmlformats.org/drawingml/2006/main" wrap="square" lIns="0" tIns="0" rIns="0" bIns="0" anchor="ctr">
+            <a:noAutofit/>
+          </a:bodyPr>
           <a:lstStyle xmlns:a="http://schemas.openxmlformats.org/drawingml/2006/main"/>
           <a:p xmlns:a="http://schemas.openxmlformats.org/drawingml/2006/main">
             <a:pPr>
+              <a:buNone/>
               <a:defRPr sz="1350" b="1">
                 <a:solidFill>
                   <a:srgbClr val="28685E"/>
                 </a:solidFill>
+                <a:latin typeface="Arial"/>
+                <a:ea typeface="Arial"/>
+                <a:cs typeface="Arial"/>
               </a:defRPr>
             </a:pPr>
             <a:r>
@@ -3762,6 +4087,9 @@
                 <a:solidFill>
                   <a:srgbClr val="28685E"/>
                 </a:solidFill>
+                <a:latin typeface="Arial"/>
+                <a:ea typeface="Arial"/>
+                <a:cs typeface="Arial"/>
               </a:rPr>
               <a:t>03</a:t>
             </a:r>
@@ -3784,8 +4112,8 @@
         </p:nvSpPr>
         <p:spPr>
           <a:xfrm xmlns:a="http://schemas.openxmlformats.org/drawingml/2006/main">
-            <a:off x="609600" y="2619375"/>
-            <a:ext cx="10972800" cy="714375"/>
+            <a:off x="609600" y="2305050"/>
+            <a:ext cx="10972800" cy="704850"/>
           </a:xfrm>
           <a:prstGeom xmlns:a="http://schemas.openxmlformats.org/drawingml/2006/main" prst="rect">
             <a:avLst/>
@@ -3797,14 +4125,20 @@
           </a:ln>
         </p:spPr>
         <p:txBody>
-          <a:bodyPr xmlns:a="http://schemas.openxmlformats.org/drawingml/2006/main" lIns="0" tIns="0" rIns="0" bIns="0" anchor="ctr"/>
+          <a:bodyPr xmlns:a="http://schemas.openxmlformats.org/drawingml/2006/main" wrap="square" lIns="0" tIns="0" rIns="0" bIns="0" anchor="ctr">
+            <a:noAutofit/>
+          </a:bodyPr>
           <a:lstStyle xmlns:a="http://schemas.openxmlformats.org/drawingml/2006/main"/>
           <a:p xmlns:a="http://schemas.openxmlformats.org/drawingml/2006/main">
             <a:pPr>
+              <a:buNone/>
               <a:defRPr sz="2550" b="0">
                 <a:solidFill>
                   <a:srgbClr val="152B3A"/>
                 </a:solidFill>
+                <a:latin typeface="Arial"/>
+                <a:ea typeface="Arial"/>
+                <a:cs typeface="Arial"/>
               </a:defRPr>
             </a:pPr>
             <a:r>
@@ -3812,6 +4146,9 @@
                 <a:solidFill>
                   <a:srgbClr val="152B3A"/>
                 </a:solidFill>
+                <a:latin typeface="Arial"/>
+                <a:ea typeface="Arial"/>
+                <a:cs typeface="Arial"/>
               </a:rPr>
               <a:t>Rice</a:t>
             </a:r>
@@ -3834,8 +4171,8 @@
         </p:nvSpPr>
         <p:spPr>
           <a:xfrm xmlns:a="http://schemas.openxmlformats.org/drawingml/2006/main">
-            <a:off x="609600" y="3409950"/>
-            <a:ext cx="10972800" cy="714375"/>
+            <a:off x="609600" y="3143250"/>
+            <a:ext cx="10972800" cy="704850"/>
           </a:xfrm>
           <a:prstGeom xmlns:a="http://schemas.openxmlformats.org/drawingml/2006/main" prst="rect">
             <a:avLst/>
@@ -3847,14 +4184,20 @@
           </a:ln>
         </p:spPr>
         <p:txBody>
-          <a:bodyPr xmlns:a="http://schemas.openxmlformats.org/drawingml/2006/main" lIns="0" tIns="0" rIns="0" bIns="0" anchor="ctr"/>
+          <a:bodyPr xmlns:a="http://schemas.openxmlformats.org/drawingml/2006/main" wrap="square" lIns="0" tIns="0" rIns="0" bIns="0" anchor="ctr">
+            <a:noAutofit/>
+          </a:bodyPr>
           <a:lstStyle xmlns:a="http://schemas.openxmlformats.org/drawingml/2006/main"/>
           <a:p xmlns:a="http://schemas.openxmlformats.org/drawingml/2006/main">
             <a:pPr>
+              <a:buNone/>
               <a:defRPr sz="2550" b="0">
                 <a:solidFill>
                   <a:srgbClr val="152B3A"/>
                 </a:solidFill>
+                <a:latin typeface="Arial"/>
+                <a:ea typeface="Arial"/>
+                <a:cs typeface="Arial"/>
               </a:defRPr>
             </a:pPr>
             <a:r>
@@ -3862,6 +4205,9 @@
                 <a:solidFill>
                   <a:srgbClr val="152B3A"/>
                 </a:solidFill>
+                <a:latin typeface="Arial"/>
+                <a:ea typeface="Arial"/>
+                <a:cs typeface="Arial"/>
               </a:rPr>
               <a:t>Chicken</a:t>
             </a:r>
@@ -3884,8 +4230,8 @@
         </p:nvSpPr>
         <p:spPr>
           <a:xfrm xmlns:a="http://schemas.openxmlformats.org/drawingml/2006/main">
-            <a:off x="609600" y="4200525"/>
-            <a:ext cx="10972800" cy="714375"/>
+            <a:off x="609600" y="3981450"/>
+            <a:ext cx="10972800" cy="704850"/>
           </a:xfrm>
           <a:prstGeom xmlns:a="http://schemas.openxmlformats.org/drawingml/2006/main" prst="rect">
             <a:avLst/>
@@ -3897,14 +4243,20 @@
           </a:ln>
         </p:spPr>
         <p:txBody>
-          <a:bodyPr xmlns:a="http://schemas.openxmlformats.org/drawingml/2006/main" lIns="0" tIns="0" rIns="0" bIns="0" anchor="ctr"/>
+          <a:bodyPr xmlns:a="http://schemas.openxmlformats.org/drawingml/2006/main" wrap="square" lIns="0" tIns="0" rIns="0" bIns="0" anchor="ctr">
+            <a:noAutofit/>
+          </a:bodyPr>
           <a:lstStyle xmlns:a="http://schemas.openxmlformats.org/drawingml/2006/main"/>
           <a:p xmlns:a="http://schemas.openxmlformats.org/drawingml/2006/main">
             <a:pPr>
+              <a:buNone/>
               <a:defRPr sz="2550" b="0">
                 <a:solidFill>
                   <a:srgbClr val="152B3A"/>
                 </a:solidFill>
+                <a:latin typeface="Arial"/>
+                <a:ea typeface="Arial"/>
+                <a:cs typeface="Arial"/>
               </a:defRPr>
             </a:pPr>
             <a:r>
@@ -3912,6 +4264,9 @@
                 <a:solidFill>
                   <a:srgbClr val="152B3A"/>
                 </a:solidFill>
+                <a:latin typeface="Arial"/>
+                <a:ea typeface="Arial"/>
+                <a:cs typeface="Arial"/>
               </a:rPr>
               <a:t>Carrot</a:t>
             </a:r>
@@ -3934,8 +4289,8 @@
         </p:nvSpPr>
         <p:spPr>
           <a:xfrm xmlns:a="http://schemas.openxmlformats.org/drawingml/2006/main">
-            <a:off x="609600" y="4991100"/>
-            <a:ext cx="10972800" cy="714375"/>
+            <a:off x="609600" y="4819650"/>
+            <a:ext cx="10972800" cy="704850"/>
           </a:xfrm>
           <a:prstGeom xmlns:a="http://schemas.openxmlformats.org/drawingml/2006/main" prst="rect">
             <a:avLst/>
@@ -3947,21 +4302,30 @@
           </a:ln>
         </p:spPr>
         <p:txBody>
-          <a:bodyPr xmlns:a="http://schemas.openxmlformats.org/drawingml/2006/main" lIns="0" tIns="0" rIns="0" bIns="0" anchor="ctr"/>
+          <a:bodyPr xmlns:a="http://schemas.openxmlformats.org/drawingml/2006/main" wrap="square" lIns="0" tIns="0" rIns="0" bIns="0" anchor="ctr">
+            <a:noAutofit/>
+          </a:bodyPr>
           <a:lstStyle xmlns:a="http://schemas.openxmlformats.org/drawingml/2006/main"/>
           <a:p xmlns:a="http://schemas.openxmlformats.org/drawingml/2006/main">
             <a:pPr>
-              <a:defRPr sz="2550" b="0">
-                <a:solidFill>
-                  <a:srgbClr val="152B3A"/>
-                </a:solidFill>
+              <a:buNone/>
+              <a:defRPr sz="2550" b="1">
+                <a:solidFill>
+                  <a:srgbClr val="28685E"/>
+                </a:solidFill>
+                <a:latin typeface="Arial"/>
+                <a:ea typeface="Arial"/>
+                <a:cs typeface="Arial"/>
               </a:defRPr>
             </a:pPr>
             <a:r>
-              <a:rPr sz="2550" b="0">
-                <a:solidFill>
-                  <a:srgbClr val="152B3A"/>
-                </a:solidFill>
+              <a:rPr sz="2550" b="1">
+                <a:solidFill>
+                  <a:srgbClr val="28685E"/>
+                </a:solidFill>
+                <a:latin typeface="Arial"/>
+                <a:ea typeface="Arial"/>
+                <a:cs typeface="Arial"/>
               </a:rPr>
               <a:t>Milk</a:t>
             </a:r>
@@ -3984,7 +4348,7 @@
     <p:bg>
       <p:bgPr>
         <a:solidFill xmlns:a="http://schemas.openxmlformats.org/drawingml/2006/main">
-          <a:srgbClr val="F5F1E8"/>
+          <a:srgbClr val="FBF9F3"/>
         </a:solidFill>
       </p:bgPr>
     </p:bg>
@@ -4013,8 +4377,8 @@
         </p:nvSpPr>
         <p:spPr>
           <a:xfrm xmlns:a="http://schemas.openxmlformats.org/drawingml/2006/main">
-            <a:off x="609600" y="552450"/>
-            <a:ext cx="781050" cy="57150"/>
+            <a:off x="609600" y="742950"/>
+            <a:ext cx="9906000" cy="38100"/>
           </a:xfrm>
           <a:prstGeom xmlns:a="http://schemas.openxmlformats.org/drawingml/2006/main" prst="rect">
             <a:avLst/>
@@ -4044,8 +4408,8 @@
         </p:nvSpPr>
         <p:spPr>
           <a:xfrm xmlns:a="http://schemas.openxmlformats.org/drawingml/2006/main">
-            <a:off x="609600" y="762000"/>
-            <a:ext cx="9334500" cy="285750"/>
+            <a:off x="609600" y="342900"/>
+            <a:ext cx="9334500" cy="266700"/>
           </a:xfrm>
           <a:prstGeom xmlns:a="http://schemas.openxmlformats.org/drawingml/2006/main" prst="rect">
             <a:avLst/>
@@ -4057,21 +4421,30 @@
           </a:ln>
         </p:spPr>
         <p:txBody>
-          <a:bodyPr xmlns:a="http://schemas.openxmlformats.org/drawingml/2006/main" lIns="0" tIns="0" rIns="0" bIns="0" anchor="ctr"/>
+          <a:bodyPr xmlns:a="http://schemas.openxmlformats.org/drawingml/2006/main" wrap="square" lIns="0" tIns="0" rIns="0" bIns="0" anchor="ctr">
+            <a:noAutofit/>
+          </a:bodyPr>
           <a:lstStyle xmlns:a="http://schemas.openxmlformats.org/drawingml/2006/main"/>
           <a:p xmlns:a="http://schemas.openxmlformats.org/drawingml/2006/main">
             <a:pPr>
-              <a:defRPr sz="1500" b="1">
+              <a:buNone/>
+              <a:defRPr sz="1425" b="1">
                 <a:solidFill>
                   <a:srgbClr val="28685E"/>
                 </a:solidFill>
+                <a:latin typeface="Arial"/>
+                <a:ea typeface="Arial"/>
+                <a:cs typeface="Arial"/>
               </a:defRPr>
             </a:pPr>
             <a:r>
-              <a:rPr sz="1500" b="1">
+              <a:rPr sz="1425" b="1">
                 <a:solidFill>
                   <a:srgbClr val="28685E"/>
                 </a:solidFill>
+                <a:latin typeface="Arial"/>
+                <a:ea typeface="Arial"/>
+                <a:cs typeface="Arial"/>
               </a:rPr>
               <a:t>MADE BY MATT  /  BUILD SCIENCE</a:t>
             </a:r>
@@ -4080,14 +4453,14 @@
       </p:sp>
       <p:pic>
         <p:nvPicPr>
-          <p:cNvPr id="14" name=""/>
+          <p:cNvPr id="16" name=""/>
           <p:cNvPicPr>
             <a:picLocks xmlns:a="http://schemas.openxmlformats.org/drawingml/2006/main" noChangeAspect="1"/>
           </p:cNvPicPr>
           <p:nvPr/>
         </p:nvPicPr>
         <p:blipFill>
-          <a:blip xmlns:r="http://schemas.openxmlformats.org/officeDocument/2006/relationships" xmlns:a="http://schemas.openxmlformats.org/drawingml/2006/main" r:embed="R83e68f323aa84b3d"/>
+          <a:blip xmlns:r="http://schemas.openxmlformats.org/officeDocument/2006/relationships" xmlns:a="http://schemas.openxmlformats.org/drawingml/2006/main" r:embed="R8cfbc9213b4d4fc8"/>
           <a:stretch xmlns:a="http://schemas.openxmlformats.org/drawingml/2006/main"/>
         </p:blipFill>
         <p:spPr>
@@ -4116,8 +4489,8 @@
         </p:nvSpPr>
         <p:spPr>
           <a:xfrm xmlns:a="http://schemas.openxmlformats.org/drawingml/2006/main">
-            <a:off x="609600" y="1352550"/>
-            <a:ext cx="10972800" cy="952500"/>
+            <a:off x="609600" y="1047750"/>
+            <a:ext cx="10972800" cy="895350"/>
           </a:xfrm>
           <a:prstGeom xmlns:a="http://schemas.openxmlformats.org/drawingml/2006/main" prst="rect">
             <a:avLst/>
@@ -4129,21 +4502,30 @@
           </a:ln>
         </p:spPr>
         <p:txBody>
-          <a:bodyPr xmlns:a="http://schemas.openxmlformats.org/drawingml/2006/main" lIns="0" tIns="0" rIns="0" bIns="0" anchor="ctr"/>
+          <a:bodyPr xmlns:a="http://schemas.openxmlformats.org/drawingml/2006/main" wrap="square" lIns="0" tIns="0" rIns="0" bIns="0" anchor="ctr">
+            <a:noAutofit/>
+          </a:bodyPr>
           <a:lstStyle xmlns:a="http://schemas.openxmlformats.org/drawingml/2006/main"/>
           <a:p xmlns:a="http://schemas.openxmlformats.org/drawingml/2006/main">
             <a:pPr>
-              <a:defRPr sz="3750" b="1">
+              <a:buNone/>
+              <a:defRPr sz="3600" b="1">
                 <a:solidFill>
                   <a:srgbClr val="152B3A"/>
                 </a:solidFill>
+                <a:latin typeface="Arial"/>
+                <a:ea typeface="Arial"/>
+                <a:cs typeface="Arial"/>
               </a:defRPr>
             </a:pPr>
             <a:r>
-              <a:rPr sz="3750" b="1">
+              <a:rPr sz="3600" b="1">
                 <a:solidFill>
                   <a:srgbClr val="152B3A"/>
                 </a:solidFill>
+                <a:latin typeface="Arial"/>
+                <a:ea typeface="Arial"/>
+                <a:cs typeface="Arial"/>
               </a:rPr>
               <a:t>Case B: different cards</a:t>
             </a:r>
@@ -4210,21 +4592,30 @@
           </a:ln>
         </p:spPr>
         <p:txBody>
-          <a:bodyPr xmlns:a="http://schemas.openxmlformats.org/drawingml/2006/main" lIns="0" tIns="0" rIns="0" bIns="0" anchor="ctr"/>
+          <a:bodyPr xmlns:a="http://schemas.openxmlformats.org/drawingml/2006/main" wrap="square" lIns="0" tIns="0" rIns="0" bIns="0" anchor="ctr">
+            <a:noAutofit/>
+          </a:bodyPr>
           <a:lstStyle xmlns:a="http://schemas.openxmlformats.org/drawingml/2006/main"/>
           <a:p xmlns:a="http://schemas.openxmlformats.org/drawingml/2006/main">
             <a:pPr>
-              <a:defRPr sz="1275" b="0">
+              <a:buNone/>
+              <a:defRPr sz="1200" b="0">
                 <a:solidFill>
                   <a:srgbClr val="50616B"/>
                 </a:solidFill>
+                <a:latin typeface="Arial"/>
+                <a:ea typeface="Arial"/>
+                <a:cs typeface="Arial"/>
               </a:defRPr>
             </a:pPr>
             <a:r>
-              <a:rPr sz="1275" b="0">
+              <a:rPr sz="1200" b="0">
                 <a:solidFill>
                   <a:srgbClr val="50616B"/>
                 </a:solidFill>
+                <a:latin typeface="Arial"/>
+                <a:ea typeface="Arial"/>
+                <a:cs typeface="Arial"/>
               </a:rPr>
               <a:t>AUTUMN 1  ·  WEEK 6  ·  LESSON B</a:t>
             </a:r>
@@ -4260,14 +4651,20 @@
           </a:ln>
         </p:spPr>
         <p:txBody>
-          <a:bodyPr xmlns:a="http://schemas.openxmlformats.org/drawingml/2006/main" lIns="0" tIns="0" rIns="0" bIns="0" anchor="ctr"/>
+          <a:bodyPr xmlns:a="http://schemas.openxmlformats.org/drawingml/2006/main" wrap="square" lIns="0" tIns="0" rIns="0" bIns="0" anchor="ctr">
+            <a:noAutofit/>
+          </a:bodyPr>
           <a:lstStyle xmlns:a="http://schemas.openxmlformats.org/drawingml/2006/main"/>
           <a:p xmlns:a="http://schemas.openxmlformats.org/drawingml/2006/main">
             <a:pPr>
+              <a:buNone/>
               <a:defRPr sz="1350" b="1">
                 <a:solidFill>
                   <a:srgbClr val="28685E"/>
                 </a:solidFill>
+                <a:latin typeface="Arial"/>
+                <a:ea typeface="Arial"/>
+                <a:cs typeface="Arial"/>
               </a:defRPr>
             </a:pPr>
             <a:r>
@@ -4275,6 +4672,9 @@
                 <a:solidFill>
                   <a:srgbClr val="28685E"/>
                 </a:solidFill>
+                <a:latin typeface="Arial"/>
+                <a:ea typeface="Arial"/>
+                <a:cs typeface="Arial"/>
               </a:rPr>
               <a:t>04</a:t>
             </a:r>
@@ -4297,8 +4697,8 @@
         </p:nvSpPr>
         <p:spPr>
           <a:xfrm xmlns:a="http://schemas.openxmlformats.org/drawingml/2006/main">
-            <a:off x="609600" y="2619375"/>
-            <a:ext cx="10972800" cy="714375"/>
+            <a:off x="609600" y="2305050"/>
+            <a:ext cx="10972800" cy="704850"/>
           </a:xfrm>
           <a:prstGeom xmlns:a="http://schemas.openxmlformats.org/drawingml/2006/main" prst="rect">
             <a:avLst/>
@@ -4310,14 +4710,20 @@
           </a:ln>
         </p:spPr>
         <p:txBody>
-          <a:bodyPr xmlns:a="http://schemas.openxmlformats.org/drawingml/2006/main" lIns="0" tIns="0" rIns="0" bIns="0" anchor="ctr"/>
+          <a:bodyPr xmlns:a="http://schemas.openxmlformats.org/drawingml/2006/main" wrap="square" lIns="0" tIns="0" rIns="0" bIns="0" anchor="ctr">
+            <a:noAutofit/>
+          </a:bodyPr>
           <a:lstStyle xmlns:a="http://schemas.openxmlformats.org/drawingml/2006/main"/>
           <a:p xmlns:a="http://schemas.openxmlformats.org/drawingml/2006/main">
             <a:pPr>
+              <a:buNone/>
               <a:defRPr sz="2550" b="0">
                 <a:solidFill>
                   <a:srgbClr val="152B3A"/>
                 </a:solidFill>
+                <a:latin typeface="Arial"/>
+                <a:ea typeface="Arial"/>
+                <a:cs typeface="Arial"/>
               </a:defRPr>
             </a:pPr>
             <a:r>
@@ -4325,6 +4731,9 @@
                 <a:solidFill>
                   <a:srgbClr val="152B3A"/>
                 </a:solidFill>
+                <a:latin typeface="Arial"/>
+                <a:ea typeface="Arial"/>
+                <a:cs typeface="Arial"/>
               </a:rPr>
               <a:t>Bread</a:t>
             </a:r>
@@ -4347,8 +4756,8 @@
         </p:nvSpPr>
         <p:spPr>
           <a:xfrm xmlns:a="http://schemas.openxmlformats.org/drawingml/2006/main">
-            <a:off x="609600" y="3409950"/>
-            <a:ext cx="10972800" cy="714375"/>
+            <a:off x="609600" y="3143250"/>
+            <a:ext cx="10972800" cy="704850"/>
           </a:xfrm>
           <a:prstGeom xmlns:a="http://schemas.openxmlformats.org/drawingml/2006/main" prst="rect">
             <a:avLst/>
@@ -4360,14 +4769,20 @@
           </a:ln>
         </p:spPr>
         <p:txBody>
-          <a:bodyPr xmlns:a="http://schemas.openxmlformats.org/drawingml/2006/main" lIns="0" tIns="0" rIns="0" bIns="0" anchor="ctr"/>
+          <a:bodyPr xmlns:a="http://schemas.openxmlformats.org/drawingml/2006/main" wrap="square" lIns="0" tIns="0" rIns="0" bIns="0" anchor="ctr">
+            <a:noAutofit/>
+          </a:bodyPr>
           <a:lstStyle xmlns:a="http://schemas.openxmlformats.org/drawingml/2006/main"/>
           <a:p xmlns:a="http://schemas.openxmlformats.org/drawingml/2006/main">
             <a:pPr>
+              <a:buNone/>
               <a:defRPr sz="2550" b="0">
                 <a:solidFill>
                   <a:srgbClr val="152B3A"/>
                 </a:solidFill>
+                <a:latin typeface="Arial"/>
+                <a:ea typeface="Arial"/>
+                <a:cs typeface="Arial"/>
               </a:defRPr>
             </a:pPr>
             <a:r>
@@ -4375,6 +4790,9 @@
                 <a:solidFill>
                   <a:srgbClr val="152B3A"/>
                 </a:solidFill>
+                <a:latin typeface="Arial"/>
+                <a:ea typeface="Arial"/>
+                <a:cs typeface="Arial"/>
               </a:rPr>
               <a:t>Beans</a:t>
             </a:r>
@@ -4397,8 +4815,8 @@
         </p:nvSpPr>
         <p:spPr>
           <a:xfrm xmlns:a="http://schemas.openxmlformats.org/drawingml/2006/main">
-            <a:off x="609600" y="4200525"/>
-            <a:ext cx="10972800" cy="714375"/>
+            <a:off x="609600" y="3981450"/>
+            <a:ext cx="10972800" cy="704850"/>
           </a:xfrm>
           <a:prstGeom xmlns:a="http://schemas.openxmlformats.org/drawingml/2006/main" prst="rect">
             <a:avLst/>
@@ -4410,14 +4828,20 @@
           </a:ln>
         </p:spPr>
         <p:txBody>
-          <a:bodyPr xmlns:a="http://schemas.openxmlformats.org/drawingml/2006/main" lIns="0" tIns="0" rIns="0" bIns="0" anchor="ctr"/>
+          <a:bodyPr xmlns:a="http://schemas.openxmlformats.org/drawingml/2006/main" wrap="square" lIns="0" tIns="0" rIns="0" bIns="0" anchor="ctr">
+            <a:noAutofit/>
+          </a:bodyPr>
           <a:lstStyle xmlns:a="http://schemas.openxmlformats.org/drawingml/2006/main"/>
           <a:p xmlns:a="http://schemas.openxmlformats.org/drawingml/2006/main">
             <a:pPr>
+              <a:buNone/>
               <a:defRPr sz="2550" b="0">
                 <a:solidFill>
                   <a:srgbClr val="152B3A"/>
                 </a:solidFill>
+                <a:latin typeface="Arial"/>
+                <a:ea typeface="Arial"/>
+                <a:cs typeface="Arial"/>
               </a:defRPr>
             </a:pPr>
             <a:r>
@@ -4425,6 +4849,9 @@
                 <a:solidFill>
                   <a:srgbClr val="152B3A"/>
                 </a:solidFill>
+                <a:latin typeface="Arial"/>
+                <a:ea typeface="Arial"/>
+                <a:cs typeface="Arial"/>
               </a:rPr>
               <a:t>Apple</a:t>
             </a:r>
@@ -4447,8 +4874,8 @@
         </p:nvSpPr>
         <p:spPr>
           <a:xfrm xmlns:a="http://schemas.openxmlformats.org/drawingml/2006/main">
-            <a:off x="609600" y="4991100"/>
-            <a:ext cx="10972800" cy="714375"/>
+            <a:off x="609600" y="4819650"/>
+            <a:ext cx="10972800" cy="704850"/>
           </a:xfrm>
           <a:prstGeom xmlns:a="http://schemas.openxmlformats.org/drawingml/2006/main" prst="rect">
             <a:avLst/>
@@ -4460,21 +4887,30 @@
           </a:ln>
         </p:spPr>
         <p:txBody>
-          <a:bodyPr xmlns:a="http://schemas.openxmlformats.org/drawingml/2006/main" lIns="0" tIns="0" rIns="0" bIns="0" anchor="ctr"/>
+          <a:bodyPr xmlns:a="http://schemas.openxmlformats.org/drawingml/2006/main" wrap="square" lIns="0" tIns="0" rIns="0" bIns="0" anchor="ctr">
+            <a:noAutofit/>
+          </a:bodyPr>
           <a:lstStyle xmlns:a="http://schemas.openxmlformats.org/drawingml/2006/main"/>
           <a:p xmlns:a="http://schemas.openxmlformats.org/drawingml/2006/main">
             <a:pPr>
-              <a:defRPr sz="2550" b="0">
-                <a:solidFill>
-                  <a:srgbClr val="152B3A"/>
-                </a:solidFill>
+              <a:buNone/>
+              <a:defRPr sz="2550" b="1">
+                <a:solidFill>
+                  <a:srgbClr val="28685E"/>
+                </a:solidFill>
+                <a:latin typeface="Arial"/>
+                <a:ea typeface="Arial"/>
+                <a:cs typeface="Arial"/>
               </a:defRPr>
             </a:pPr>
             <a:r>
-              <a:rPr sz="2550" b="0">
-                <a:solidFill>
-                  <a:srgbClr val="152B3A"/>
-                </a:solidFill>
+              <a:rPr sz="2550" b="1">
+                <a:solidFill>
+                  <a:srgbClr val="28685E"/>
+                </a:solidFill>
+                <a:latin typeface="Arial"/>
+                <a:ea typeface="Arial"/>
+                <a:cs typeface="Arial"/>
               </a:rPr>
               <a:t>Fortified soya alternative</a:t>
             </a:r>
@@ -4497,7 +4933,7 @@
     <p:bg>
       <p:bgPr>
         <a:solidFill xmlns:a="http://schemas.openxmlformats.org/drawingml/2006/main">
-          <a:srgbClr val="F5F1E8"/>
+          <a:srgbClr val="FBF9F3"/>
         </a:solidFill>
       </p:bgPr>
     </p:bg>
@@ -4526,8 +4962,8 @@
         </p:nvSpPr>
         <p:spPr>
           <a:xfrm xmlns:a="http://schemas.openxmlformats.org/drawingml/2006/main">
-            <a:off x="609600" y="552450"/>
-            <a:ext cx="781050" cy="57150"/>
+            <a:off x="609600" y="742950"/>
+            <a:ext cx="9906000" cy="38100"/>
           </a:xfrm>
           <a:prstGeom xmlns:a="http://schemas.openxmlformats.org/drawingml/2006/main" prst="rect">
             <a:avLst/>
@@ -4557,8 +4993,8 @@
         </p:nvSpPr>
         <p:spPr>
           <a:xfrm xmlns:a="http://schemas.openxmlformats.org/drawingml/2006/main">
-            <a:off x="609600" y="762000"/>
-            <a:ext cx="9334500" cy="285750"/>
+            <a:off x="609600" y="342900"/>
+            <a:ext cx="9334500" cy="266700"/>
           </a:xfrm>
           <a:prstGeom xmlns:a="http://schemas.openxmlformats.org/drawingml/2006/main" prst="rect">
             <a:avLst/>
@@ -4570,21 +5006,30 @@
           </a:ln>
         </p:spPr>
         <p:txBody>
-          <a:bodyPr xmlns:a="http://schemas.openxmlformats.org/drawingml/2006/main" lIns="0" tIns="0" rIns="0" bIns="0" anchor="ctr"/>
+          <a:bodyPr xmlns:a="http://schemas.openxmlformats.org/drawingml/2006/main" wrap="square" lIns="0" tIns="0" rIns="0" bIns="0" anchor="ctr">
+            <a:noAutofit/>
+          </a:bodyPr>
           <a:lstStyle xmlns:a="http://schemas.openxmlformats.org/drawingml/2006/main"/>
           <a:p xmlns:a="http://schemas.openxmlformats.org/drawingml/2006/main">
             <a:pPr>
-              <a:defRPr sz="1500" b="1">
+              <a:buNone/>
+              <a:defRPr sz="1425" b="1">
                 <a:solidFill>
                   <a:srgbClr val="28685E"/>
                 </a:solidFill>
+                <a:latin typeface="Arial"/>
+                <a:ea typeface="Arial"/>
+                <a:cs typeface="Arial"/>
               </a:defRPr>
             </a:pPr>
             <a:r>
-              <a:rPr sz="1500" b="1">
+              <a:rPr sz="1425" b="1">
                 <a:solidFill>
                   <a:srgbClr val="28685E"/>
                 </a:solidFill>
+                <a:latin typeface="Arial"/>
+                <a:ea typeface="Arial"/>
+                <a:cs typeface="Arial"/>
               </a:rPr>
               <a:t>MADE BY MATT  /  BUILD SCIENCE</a:t>
             </a:r>
@@ -4593,14 +5038,14 @@
       </p:sp>
       <p:pic>
         <p:nvPicPr>
-          <p:cNvPr id="14" name=""/>
+          <p:cNvPr id="18" name=""/>
           <p:cNvPicPr>
             <a:picLocks xmlns:a="http://schemas.openxmlformats.org/drawingml/2006/main" noChangeAspect="1"/>
           </p:cNvPicPr>
           <p:nvPr/>
         </p:nvPicPr>
         <p:blipFill>
-          <a:blip xmlns:r="http://schemas.openxmlformats.org/officeDocument/2006/relationships" xmlns:a="http://schemas.openxmlformats.org/drawingml/2006/main" r:embed="Re3f5464f5357405b"/>
+          <a:blip xmlns:r="http://schemas.openxmlformats.org/officeDocument/2006/relationships" xmlns:a="http://schemas.openxmlformats.org/drawingml/2006/main" r:embed="R364583e579f94e1f"/>
           <a:stretch xmlns:a="http://schemas.openxmlformats.org/drawingml/2006/main"/>
         </p:blipFill>
         <p:spPr>
@@ -4629,8 +5074,8 @@
         </p:nvSpPr>
         <p:spPr>
           <a:xfrm xmlns:a="http://schemas.openxmlformats.org/drawingml/2006/main">
-            <a:off x="609600" y="1352550"/>
-            <a:ext cx="10972800" cy="952500"/>
+            <a:off x="609600" y="1047750"/>
+            <a:ext cx="10972800" cy="895350"/>
           </a:xfrm>
           <a:prstGeom xmlns:a="http://schemas.openxmlformats.org/drawingml/2006/main" prst="rect">
             <a:avLst/>
@@ -4642,21 +5087,30 @@
           </a:ln>
         </p:spPr>
         <p:txBody>
-          <a:bodyPr xmlns:a="http://schemas.openxmlformats.org/drawingml/2006/main" lIns="0" tIns="0" rIns="0" bIns="0" anchor="ctr"/>
+          <a:bodyPr xmlns:a="http://schemas.openxmlformats.org/drawingml/2006/main" wrap="square" lIns="0" tIns="0" rIns="0" bIns="0" anchor="ctr">
+            <a:noAutofit/>
+          </a:bodyPr>
           <a:lstStyle xmlns:a="http://schemas.openxmlformats.org/drawingml/2006/main"/>
           <a:p xmlns:a="http://schemas.openxmlformats.org/drawingml/2006/main">
             <a:pPr>
-              <a:defRPr sz="3750" b="1">
+              <a:buNone/>
+              <a:defRPr sz="3600" b="1">
                 <a:solidFill>
                   <a:srgbClr val="152B3A"/>
                 </a:solidFill>
+                <a:latin typeface="Arial"/>
+                <a:ea typeface="Arial"/>
+                <a:cs typeface="Arial"/>
               </a:defRPr>
             </a:pPr>
             <a:r>
-              <a:rPr sz="3750" b="1">
+              <a:rPr sz="3600" b="1">
                 <a:solidFill>
                   <a:srgbClr val="152B3A"/>
                 </a:solidFill>
+                <a:latin typeface="Arial"/>
+                <a:ea typeface="Arial"/>
+                <a:cs typeface="Arial"/>
               </a:rPr>
               <a:t>Compare the two models</a:t>
             </a:r>
@@ -4723,21 +5177,30 @@
           </a:ln>
         </p:spPr>
         <p:txBody>
-          <a:bodyPr xmlns:a="http://schemas.openxmlformats.org/drawingml/2006/main" lIns="0" tIns="0" rIns="0" bIns="0" anchor="ctr"/>
+          <a:bodyPr xmlns:a="http://schemas.openxmlformats.org/drawingml/2006/main" wrap="square" lIns="0" tIns="0" rIns="0" bIns="0" anchor="ctr">
+            <a:noAutofit/>
+          </a:bodyPr>
           <a:lstStyle xmlns:a="http://schemas.openxmlformats.org/drawingml/2006/main"/>
           <a:p xmlns:a="http://schemas.openxmlformats.org/drawingml/2006/main">
             <a:pPr>
-              <a:defRPr sz="1275" b="0">
+              <a:buNone/>
+              <a:defRPr sz="1200" b="0">
                 <a:solidFill>
                   <a:srgbClr val="50616B"/>
                 </a:solidFill>
+                <a:latin typeface="Arial"/>
+                <a:ea typeface="Arial"/>
+                <a:cs typeface="Arial"/>
               </a:defRPr>
             </a:pPr>
             <a:r>
-              <a:rPr sz="1275" b="0">
+              <a:rPr sz="1200" b="0">
                 <a:solidFill>
                   <a:srgbClr val="50616B"/>
                 </a:solidFill>
+                <a:latin typeface="Arial"/>
+                <a:ea typeface="Arial"/>
+                <a:cs typeface="Arial"/>
               </a:rPr>
               <a:t>AUTUMN 1  ·  WEEK 6  ·  LESSON B</a:t>
             </a:r>
@@ -4773,14 +5236,20 @@
           </a:ln>
         </p:spPr>
         <p:txBody>
-          <a:bodyPr xmlns:a="http://schemas.openxmlformats.org/drawingml/2006/main" lIns="0" tIns="0" rIns="0" bIns="0" anchor="ctr"/>
+          <a:bodyPr xmlns:a="http://schemas.openxmlformats.org/drawingml/2006/main" wrap="square" lIns="0" tIns="0" rIns="0" bIns="0" anchor="ctr">
+            <a:noAutofit/>
+          </a:bodyPr>
           <a:lstStyle xmlns:a="http://schemas.openxmlformats.org/drawingml/2006/main"/>
           <a:p xmlns:a="http://schemas.openxmlformats.org/drawingml/2006/main">
             <a:pPr>
+              <a:buNone/>
               <a:defRPr sz="1350" b="1">
                 <a:solidFill>
                   <a:srgbClr val="28685E"/>
                 </a:solidFill>
+                <a:latin typeface="Arial"/>
+                <a:ea typeface="Arial"/>
+                <a:cs typeface="Arial"/>
               </a:defRPr>
             </a:pPr>
             <a:r>
@@ -4788,6 +5257,9 @@
                 <a:solidFill>
                   <a:srgbClr val="28685E"/>
                 </a:solidFill>
+                <a:latin typeface="Arial"/>
+                <a:ea typeface="Arial"/>
+                <a:cs typeface="Arial"/>
               </a:rPr>
               <a:t>05</a:t>
             </a:r>
@@ -4810,8 +5282,8 @@
         </p:nvSpPr>
         <p:spPr>
           <a:xfrm xmlns:a="http://schemas.openxmlformats.org/drawingml/2006/main">
-            <a:off x="609600" y="2619375"/>
-            <a:ext cx="4953000" cy="428625"/>
+            <a:off x="609600" y="2257425"/>
+            <a:ext cx="5143500" cy="533400"/>
           </a:xfrm>
           <a:prstGeom xmlns:a="http://schemas.openxmlformats.org/drawingml/2006/main" prst="rect">
             <a:avLst/>
@@ -4823,21 +5295,30 @@
           </a:ln>
         </p:spPr>
         <p:txBody>
-          <a:bodyPr xmlns:a="http://schemas.openxmlformats.org/drawingml/2006/main" lIns="0" tIns="0" rIns="0" bIns="0" anchor="ctr"/>
+          <a:bodyPr xmlns:a="http://schemas.openxmlformats.org/drawingml/2006/main" wrap="square" lIns="0" tIns="0" rIns="0" bIns="0" anchor="ctr">
+            <a:noAutofit/>
+          </a:bodyPr>
           <a:lstStyle xmlns:a="http://schemas.openxmlformats.org/drawingml/2006/main"/>
           <a:p xmlns:a="http://schemas.openxmlformats.org/drawingml/2006/main">
             <a:pPr>
-              <a:defRPr sz="2025" b="1">
+              <a:buNone/>
+              <a:defRPr sz="2100" b="1">
                 <a:solidFill>
                   <a:srgbClr val="28685E"/>
                 </a:solidFill>
+                <a:latin typeface="Arial"/>
+                <a:ea typeface="Arial"/>
+                <a:cs typeface="Arial"/>
               </a:defRPr>
             </a:pPr>
             <a:r>
-              <a:rPr sz="2025" b="1">
+              <a:rPr sz="2100" b="1">
                 <a:solidFill>
                   <a:srgbClr val="28685E"/>
                 </a:solidFill>
+                <a:latin typeface="Arial"/>
+                <a:ea typeface="Arial"/>
+                <a:cs typeface="Arial"/>
               </a:rPr>
               <a:t>WHAT CHANGED?</a:t>
             </a:r>
@@ -4860,8 +5341,8 @@
         </p:nvSpPr>
         <p:spPr>
           <a:xfrm xmlns:a="http://schemas.openxmlformats.org/drawingml/2006/main">
-            <a:off x="6572250" y="2619375"/>
-            <a:ext cx="4953000" cy="428625"/>
+            <a:off x="6572250" y="2257425"/>
+            <a:ext cx="5010150" cy="533400"/>
           </a:xfrm>
           <a:prstGeom xmlns:a="http://schemas.openxmlformats.org/drawingml/2006/main" prst="rect">
             <a:avLst/>
@@ -4873,21 +5354,30 @@
           </a:ln>
         </p:spPr>
         <p:txBody>
-          <a:bodyPr xmlns:a="http://schemas.openxmlformats.org/drawingml/2006/main" lIns="0" tIns="0" rIns="0" bIns="0" anchor="ctr"/>
+          <a:bodyPr xmlns:a="http://schemas.openxmlformats.org/drawingml/2006/main" wrap="square" lIns="0" tIns="0" rIns="0" bIns="0" anchor="ctr">
+            <a:noAutofit/>
+          </a:bodyPr>
           <a:lstStyle xmlns:a="http://schemas.openxmlformats.org/drawingml/2006/main"/>
           <a:p xmlns:a="http://schemas.openxmlformats.org/drawingml/2006/main">
             <a:pPr>
-              <a:defRPr sz="2025" b="1">
+              <a:buNone/>
+              <a:defRPr sz="2100" b="1">
                 <a:solidFill>
                   <a:srgbClr val="A65D25"/>
                 </a:solidFill>
+                <a:latin typeface="Arial"/>
+                <a:ea typeface="Arial"/>
+                <a:cs typeface="Arial"/>
               </a:defRPr>
             </a:pPr>
             <a:r>
-              <a:rPr sz="2025" b="1">
+              <a:rPr sz="2100" b="1">
                 <a:solidFill>
                   <a:srgbClr val="A65D25"/>
                 </a:solidFill>
+                <a:latin typeface="Arial"/>
+                <a:ea typeface="Arial"/>
+                <a:cs typeface="Arial"/>
               </a:rPr>
               <a:t>WHAT IS ALIKE?</a:t>
             </a:r>
@@ -4910,8 +5400,8 @@
         </p:nvSpPr>
         <p:spPr>
           <a:xfrm xmlns:a="http://schemas.openxmlformats.org/drawingml/2006/main">
-            <a:off x="609600" y="3333750"/>
-            <a:ext cx="4953000" cy="2524125"/>
+            <a:off x="609600" y="3238500"/>
+            <a:ext cx="5143500" cy="2286000"/>
           </a:xfrm>
           <a:prstGeom xmlns:a="http://schemas.openxmlformats.org/drawingml/2006/main" prst="rect">
             <a:avLst/>
@@ -4923,14 +5413,20 @@
           </a:ln>
         </p:spPr>
         <p:txBody>
-          <a:bodyPr xmlns:a="http://schemas.openxmlformats.org/drawingml/2006/main" lIns="0" tIns="0" rIns="0" bIns="0" anchor="ctr"/>
+          <a:bodyPr xmlns:a="http://schemas.openxmlformats.org/drawingml/2006/main" wrap="square" lIns="0" tIns="0" rIns="0" bIns="0" anchor="ctr">
+            <a:noAutofit/>
+          </a:bodyPr>
           <a:lstStyle xmlns:a="http://schemas.openxmlformats.org/drawingml/2006/main"/>
           <a:p xmlns:a="http://schemas.openxmlformats.org/drawingml/2006/main">
             <a:pPr>
+              <a:buNone/>
               <a:defRPr sz="2400" b="0">
                 <a:solidFill>
                   <a:srgbClr val="152B3A"/>
                 </a:solidFill>
+                <a:latin typeface="Arial"/>
+                <a:ea typeface="Arial"/>
+                <a:cs typeface="Arial"/>
               </a:defRPr>
             </a:pPr>
             <a:r>
@@ -4938,16 +5434,23 @@
                 <a:solidFill>
                   <a:srgbClr val="152B3A"/>
                 </a:solidFill>
+                <a:latin typeface="Arial"/>
+                <a:ea typeface="Arial"/>
+                <a:cs typeface="Arial"/>
               </a:rPr>
               <a:t>Rice → bread</a:t>
             </a:r>
           </a:p>
           <a:p xmlns:a="http://schemas.openxmlformats.org/drawingml/2006/main">
             <a:pPr>
+              <a:buNone/>
               <a:defRPr sz="2400" b="0">
                 <a:solidFill>
                   <a:srgbClr val="152B3A"/>
                 </a:solidFill>
+                <a:latin typeface="Arial"/>
+                <a:ea typeface="Arial"/>
+                <a:cs typeface="Arial"/>
               </a:defRPr>
             </a:pPr>
             <a:r>
@@ -4955,16 +5458,23 @@
                 <a:solidFill>
                   <a:srgbClr val="152B3A"/>
                 </a:solidFill>
+                <a:latin typeface="Arial"/>
+                <a:ea typeface="Arial"/>
+                <a:cs typeface="Arial"/>
               </a:rPr>
               <a:t>Chicken → beans</a:t>
             </a:r>
           </a:p>
           <a:p xmlns:a="http://schemas.openxmlformats.org/drawingml/2006/main">
             <a:pPr>
+              <a:buNone/>
               <a:defRPr sz="2400" b="0">
                 <a:solidFill>
                   <a:srgbClr val="152B3A"/>
                 </a:solidFill>
+                <a:latin typeface="Arial"/>
+                <a:ea typeface="Arial"/>
+                <a:cs typeface="Arial"/>
               </a:defRPr>
             </a:pPr>
             <a:r>
@@ -4972,16 +5482,23 @@
                 <a:solidFill>
                   <a:srgbClr val="152B3A"/>
                 </a:solidFill>
+                <a:latin typeface="Arial"/>
+                <a:ea typeface="Arial"/>
+                <a:cs typeface="Arial"/>
               </a:rPr>
               <a:t>Carrot → apple</a:t>
             </a:r>
           </a:p>
           <a:p xmlns:a="http://schemas.openxmlformats.org/drawingml/2006/main">
             <a:pPr>
+              <a:buNone/>
               <a:defRPr sz="2400" b="0">
                 <a:solidFill>
                   <a:srgbClr val="152B3A"/>
                 </a:solidFill>
+                <a:latin typeface="Arial"/>
+                <a:ea typeface="Arial"/>
+                <a:cs typeface="Arial"/>
               </a:defRPr>
             </a:pPr>
             <a:r>
@@ -4989,6 +5506,9 @@
                 <a:solidFill>
                   <a:srgbClr val="152B3A"/>
                 </a:solidFill>
+                <a:latin typeface="Arial"/>
+                <a:ea typeface="Arial"/>
+                <a:cs typeface="Arial"/>
               </a:rPr>
               <a:t>Milk → fortified soya</a:t>
             </a:r>
@@ -5011,8 +5531,8 @@
         </p:nvSpPr>
         <p:spPr>
           <a:xfrm xmlns:a="http://schemas.openxmlformats.org/drawingml/2006/main">
-            <a:off x="6572250" y="3333750"/>
-            <a:ext cx="4857750" cy="2524125"/>
+            <a:off x="6572250" y="3238500"/>
+            <a:ext cx="5010150" cy="2286000"/>
           </a:xfrm>
           <a:prstGeom xmlns:a="http://schemas.openxmlformats.org/drawingml/2006/main" prst="rect">
             <a:avLst/>
@@ -5024,14 +5544,20 @@
           </a:ln>
         </p:spPr>
         <p:txBody>
-          <a:bodyPr xmlns:a="http://schemas.openxmlformats.org/drawingml/2006/main" lIns="0" tIns="0" rIns="0" bIns="0" anchor="ctr"/>
+          <a:bodyPr xmlns:a="http://schemas.openxmlformats.org/drawingml/2006/main" wrap="square" lIns="0" tIns="0" rIns="0" bIns="0" anchor="ctr">
+            <a:noAutofit/>
+          </a:bodyPr>
           <a:lstStyle xmlns:a="http://schemas.openxmlformats.org/drawingml/2006/main"/>
           <a:p xmlns:a="http://schemas.openxmlformats.org/drawingml/2006/main">
             <a:pPr>
+              <a:buNone/>
               <a:defRPr sz="2400" b="0">
                 <a:solidFill>
                   <a:srgbClr val="152B3A"/>
                 </a:solidFill>
+                <a:latin typeface="Arial"/>
+                <a:ea typeface="Arial"/>
+                <a:cs typeface="Arial"/>
               </a:defRPr>
             </a:pPr>
             <a:r>
@@ -5039,16 +5565,23 @@
                 <a:solidFill>
                   <a:srgbClr val="152B3A"/>
                 </a:solidFill>
+                <a:latin typeface="Arial"/>
+                <a:ea typeface="Arial"/>
+                <a:cs typeface="Arial"/>
               </a:rPr>
               <a:t>The specific foods differ.</a:t>
             </a:r>
           </a:p>
           <a:p xmlns:a="http://schemas.openxmlformats.org/drawingml/2006/main">
             <a:pPr>
+              <a:buNone/>
               <a:defRPr sz="2400" b="0">
                 <a:solidFill>
                   <a:srgbClr val="152B3A"/>
                 </a:solidFill>
+                <a:latin typeface="Arial"/>
+                <a:ea typeface="Arial"/>
+                <a:cs typeface="Arial"/>
               </a:defRPr>
             </a:pPr>
             <a:r>
@@ -5056,16 +5589,23 @@
                 <a:solidFill>
                   <a:srgbClr val="152B3A"/>
                 </a:solidFill>
+                <a:latin typeface="Arial"/>
+                <a:ea typeface="Arial"/>
+                <a:cs typeface="Arial"/>
               </a:rPr>
               <a:t>Broad groups are similar.</a:t>
             </a:r>
           </a:p>
           <a:p xmlns:a="http://schemas.openxmlformats.org/drawingml/2006/main">
             <a:pPr>
+              <a:buNone/>
               <a:defRPr sz="2400" b="0">
                 <a:solidFill>
                   <a:srgbClr val="152B3A"/>
                 </a:solidFill>
+                <a:latin typeface="Arial"/>
+                <a:ea typeface="Arial"/>
+                <a:cs typeface="Arial"/>
               </a:defRPr>
             </a:pPr>
             <a:r>
@@ -5073,11 +5613,76 @@
                 <a:solidFill>
                   <a:srgbClr val="152B3A"/>
                 </a:solidFill>
+                <a:latin typeface="Arial"/>
+                <a:ea typeface="Arial"/>
+                <a:cs typeface="Arial"/>
               </a:rPr>
               <a:t>Both models remain limited.</a:t>
             </a:r>
           </a:p>
         </p:txBody>
+      </p:sp>
+      <p:sp>
+        <p:nvSpPr>
+          <p:cNvPr id="14" name="">
+            <a:extLst xmlns:a="http://schemas.openxmlformats.org/drawingml/2006/main">
+              <a:ext uri="{FF2B5EF4-FFF2-40B4-BE49-F238E27FC236}">
+                <a16:creationId xmlns:a16="http://schemas.microsoft.com/office/drawing/2014/main" id="{70D654F6-8C46-4781-BC56-E23313188F0F}"/>
+              </a:ext>
+            </a:extLst>
+          </p:cNvPr>
+          <p:cNvSpPr>
+            <a:spLocks xmlns:a="http://schemas.openxmlformats.org/drawingml/2006/main" noGrp="1"/>
+          </p:cNvSpPr>
+          <p:nvPr/>
+        </p:nvSpPr>
+        <p:spPr>
+          <a:xfrm xmlns:a="http://schemas.openxmlformats.org/drawingml/2006/main">
+            <a:off x="609600" y="2886075"/>
+            <a:ext cx="5048250" cy="0"/>
+          </a:xfrm>
+          <a:prstGeom xmlns:a="http://schemas.openxmlformats.org/drawingml/2006/main" prst="line">
+            <a:avLst/>
+          </a:prstGeom>
+          <a:noFill xmlns:a="http://schemas.openxmlformats.org/drawingml/2006/main"/>
+          <a:ln xmlns:a="http://schemas.openxmlformats.org/drawingml/2006/main" w="28575">
+            <a:solidFill>
+              <a:srgbClr val="DCE7DD"/>
+            </a:solidFill>
+            <a:prstDash val="solid"/>
+          </a:ln>
+        </p:spPr>
+      </p:sp>
+      <p:sp>
+        <p:nvSpPr>
+          <p:cNvPr id="15" name="">
+            <a:extLst xmlns:a="http://schemas.openxmlformats.org/drawingml/2006/main">
+              <a:ext uri="{FF2B5EF4-FFF2-40B4-BE49-F238E27FC236}">
+                <a16:creationId xmlns:a16="http://schemas.microsoft.com/office/drawing/2014/main" id="{B353C9CC-5399-4A39-803F-4E9FD878822F}"/>
+              </a:ext>
+            </a:extLst>
+          </p:cNvPr>
+          <p:cNvSpPr>
+            <a:spLocks xmlns:a="http://schemas.openxmlformats.org/drawingml/2006/main" noGrp="1"/>
+          </p:cNvSpPr>
+          <p:nvPr/>
+        </p:nvSpPr>
+        <p:spPr>
+          <a:xfrm xmlns:a="http://schemas.openxmlformats.org/drawingml/2006/main">
+            <a:off x="6572250" y="2886075"/>
+            <a:ext cx="5010150" cy="0"/>
+          </a:xfrm>
+          <a:prstGeom xmlns:a="http://schemas.openxmlformats.org/drawingml/2006/main" prst="line">
+            <a:avLst/>
+          </a:prstGeom>
+          <a:noFill xmlns:a="http://schemas.openxmlformats.org/drawingml/2006/main"/>
+          <a:ln xmlns:a="http://schemas.openxmlformats.org/drawingml/2006/main" w="28575">
+            <a:solidFill>
+              <a:srgbClr val="DCE7DD"/>
+            </a:solidFill>
+            <a:prstDash val="solid"/>
+          </a:ln>
+        </p:spPr>
       </p:sp>
     </p:spTree>
     <p:extLst>
@@ -5095,7 +5700,7 @@
     <p:bg>
       <p:bgPr>
         <a:solidFill xmlns:a="http://schemas.openxmlformats.org/drawingml/2006/main">
-          <a:srgbClr val="F5F1E8"/>
+          <a:srgbClr val="FBF9F3"/>
         </a:solidFill>
       </p:bgPr>
     </p:bg>
@@ -5124,8 +5729,8 @@
         </p:nvSpPr>
         <p:spPr>
           <a:xfrm xmlns:a="http://schemas.openxmlformats.org/drawingml/2006/main">
-            <a:off x="609600" y="552450"/>
-            <a:ext cx="781050" cy="57150"/>
+            <a:off x="609600" y="742950"/>
+            <a:ext cx="9906000" cy="38100"/>
           </a:xfrm>
           <a:prstGeom xmlns:a="http://schemas.openxmlformats.org/drawingml/2006/main" prst="rect">
             <a:avLst/>
@@ -5155,8 +5760,8 @@
         </p:nvSpPr>
         <p:spPr>
           <a:xfrm xmlns:a="http://schemas.openxmlformats.org/drawingml/2006/main">
-            <a:off x="609600" y="762000"/>
-            <a:ext cx="9334500" cy="285750"/>
+            <a:off x="609600" y="342900"/>
+            <a:ext cx="9334500" cy="266700"/>
           </a:xfrm>
           <a:prstGeom xmlns:a="http://schemas.openxmlformats.org/drawingml/2006/main" prst="rect">
             <a:avLst/>
@@ -5168,21 +5773,30 @@
           </a:ln>
         </p:spPr>
         <p:txBody>
-          <a:bodyPr xmlns:a="http://schemas.openxmlformats.org/drawingml/2006/main" lIns="0" tIns="0" rIns="0" bIns="0" anchor="ctr"/>
+          <a:bodyPr xmlns:a="http://schemas.openxmlformats.org/drawingml/2006/main" wrap="square" lIns="0" tIns="0" rIns="0" bIns="0" anchor="ctr">
+            <a:noAutofit/>
+          </a:bodyPr>
           <a:lstStyle xmlns:a="http://schemas.openxmlformats.org/drawingml/2006/main"/>
           <a:p xmlns:a="http://schemas.openxmlformats.org/drawingml/2006/main">
             <a:pPr>
-              <a:defRPr sz="1500" b="1">
+              <a:buNone/>
+              <a:defRPr sz="1425" b="1">
                 <a:solidFill>
                   <a:srgbClr val="28685E"/>
                 </a:solidFill>
+                <a:latin typeface="Arial"/>
+                <a:ea typeface="Arial"/>
+                <a:cs typeface="Arial"/>
               </a:defRPr>
             </a:pPr>
             <a:r>
-              <a:rPr sz="1500" b="1">
+              <a:rPr sz="1425" b="1">
                 <a:solidFill>
                   <a:srgbClr val="28685E"/>
                 </a:solidFill>
+                <a:latin typeface="Arial"/>
+                <a:ea typeface="Arial"/>
+                <a:cs typeface="Arial"/>
               </a:rPr>
               <a:t>MADE BY MATT  /  BUILD SCIENCE</a:t>
             </a:r>
@@ -5191,14 +5805,14 @@
       </p:sp>
       <p:pic>
         <p:nvPicPr>
-          <p:cNvPr id="14" name=""/>
+          <p:cNvPr id="17" name=""/>
           <p:cNvPicPr>
             <a:picLocks xmlns:a="http://schemas.openxmlformats.org/drawingml/2006/main" noChangeAspect="1"/>
           </p:cNvPicPr>
           <p:nvPr/>
         </p:nvPicPr>
         <p:blipFill>
-          <a:blip xmlns:r="http://schemas.openxmlformats.org/officeDocument/2006/relationships" xmlns:a="http://schemas.openxmlformats.org/drawingml/2006/main" r:embed="Rafd04077f1c34984"/>
+          <a:blip xmlns:r="http://schemas.openxmlformats.org/officeDocument/2006/relationships" xmlns:a="http://schemas.openxmlformats.org/drawingml/2006/main" r:embed="R88792d1afd0c49f5"/>
           <a:stretch xmlns:a="http://schemas.openxmlformats.org/drawingml/2006/main"/>
         </p:blipFill>
         <p:spPr>
@@ -5227,8 +5841,8 @@
         </p:nvSpPr>
         <p:spPr>
           <a:xfrm xmlns:a="http://schemas.openxmlformats.org/drawingml/2006/main">
-            <a:off x="609600" y="1352550"/>
-            <a:ext cx="10972800" cy="952500"/>
+            <a:off x="609600" y="1047750"/>
+            <a:ext cx="10972800" cy="895350"/>
           </a:xfrm>
           <a:prstGeom xmlns:a="http://schemas.openxmlformats.org/drawingml/2006/main" prst="rect">
             <a:avLst/>
@@ -5240,21 +5854,30 @@
           </a:ln>
         </p:spPr>
         <p:txBody>
-          <a:bodyPr xmlns:a="http://schemas.openxmlformats.org/drawingml/2006/main" lIns="0" tIns="0" rIns="0" bIns="0" anchor="ctr"/>
+          <a:bodyPr xmlns:a="http://schemas.openxmlformats.org/drawingml/2006/main" wrap="square" lIns="0" tIns="0" rIns="0" bIns="0" anchor="ctr">
+            <a:noAutofit/>
+          </a:bodyPr>
           <a:lstStyle xmlns:a="http://schemas.openxmlformats.org/drawingml/2006/main"/>
           <a:p xmlns:a="http://schemas.openxmlformats.org/drawingml/2006/main">
             <a:pPr>
-              <a:defRPr sz="3750" b="1">
+              <a:buNone/>
+              <a:defRPr sz="3600" b="1">
                 <a:solidFill>
                   <a:srgbClr val="152B3A"/>
                 </a:solidFill>
+                <a:latin typeface="Arial"/>
+                <a:ea typeface="Arial"/>
+                <a:cs typeface="Arial"/>
               </a:defRPr>
             </a:pPr>
             <a:r>
-              <a:rPr sz="3750" b="1">
+              <a:rPr sz="3600" b="1">
                 <a:solidFill>
                   <a:srgbClr val="152B3A"/>
                 </a:solidFill>
+                <a:latin typeface="Arial"/>
+                <a:ea typeface="Arial"/>
+                <a:cs typeface="Arial"/>
               </a:rPr>
               <a:t>Make a protein-source swap</a:t>
             </a:r>
@@ -5321,21 +5944,30 @@
           </a:ln>
         </p:spPr>
         <p:txBody>
-          <a:bodyPr xmlns:a="http://schemas.openxmlformats.org/drawingml/2006/main" lIns="0" tIns="0" rIns="0" bIns="0" anchor="ctr"/>
+          <a:bodyPr xmlns:a="http://schemas.openxmlformats.org/drawingml/2006/main" wrap="square" lIns="0" tIns="0" rIns="0" bIns="0" anchor="ctr">
+            <a:noAutofit/>
+          </a:bodyPr>
           <a:lstStyle xmlns:a="http://schemas.openxmlformats.org/drawingml/2006/main"/>
           <a:p xmlns:a="http://schemas.openxmlformats.org/drawingml/2006/main">
             <a:pPr>
-              <a:defRPr sz="1275" b="0">
+              <a:buNone/>
+              <a:defRPr sz="1200" b="0">
                 <a:solidFill>
                   <a:srgbClr val="50616B"/>
                 </a:solidFill>
+                <a:latin typeface="Arial"/>
+                <a:ea typeface="Arial"/>
+                <a:cs typeface="Arial"/>
               </a:defRPr>
             </a:pPr>
             <a:r>
-              <a:rPr sz="1275" b="0">
+              <a:rPr sz="1200" b="0">
                 <a:solidFill>
                   <a:srgbClr val="50616B"/>
                 </a:solidFill>
+                <a:latin typeface="Arial"/>
+                <a:ea typeface="Arial"/>
+                <a:cs typeface="Arial"/>
               </a:rPr>
               <a:t>AUTUMN 1  ·  WEEK 6  ·  LESSON B</a:t>
             </a:r>
@@ -5371,14 +6003,20 @@
           </a:ln>
         </p:spPr>
         <p:txBody>
-          <a:bodyPr xmlns:a="http://schemas.openxmlformats.org/drawingml/2006/main" lIns="0" tIns="0" rIns="0" bIns="0" anchor="ctr"/>
+          <a:bodyPr xmlns:a="http://schemas.openxmlformats.org/drawingml/2006/main" wrap="square" lIns="0" tIns="0" rIns="0" bIns="0" anchor="ctr">
+            <a:noAutofit/>
+          </a:bodyPr>
           <a:lstStyle xmlns:a="http://schemas.openxmlformats.org/drawingml/2006/main"/>
           <a:p xmlns:a="http://schemas.openxmlformats.org/drawingml/2006/main">
             <a:pPr>
+              <a:buNone/>
               <a:defRPr sz="1350" b="1">
                 <a:solidFill>
                   <a:srgbClr val="28685E"/>
                 </a:solidFill>
+                <a:latin typeface="Arial"/>
+                <a:ea typeface="Arial"/>
+                <a:cs typeface="Arial"/>
               </a:defRPr>
             </a:pPr>
             <a:r>
@@ -5386,6 +6024,9 @@
                 <a:solidFill>
                   <a:srgbClr val="28685E"/>
                 </a:solidFill>
+                <a:latin typeface="Arial"/>
+                <a:ea typeface="Arial"/>
+                <a:cs typeface="Arial"/>
               </a:rPr>
               <a:t>06</a:t>
             </a:r>
@@ -5408,8 +6049,8 @@
         </p:nvSpPr>
         <p:spPr>
           <a:xfrm xmlns:a="http://schemas.openxmlformats.org/drawingml/2006/main">
-            <a:off x="609600" y="2619375"/>
-            <a:ext cx="10972800" cy="714375"/>
+            <a:off x="609600" y="2305050"/>
+            <a:ext cx="7096125" cy="704850"/>
           </a:xfrm>
           <a:prstGeom xmlns:a="http://schemas.openxmlformats.org/drawingml/2006/main" prst="rect">
             <a:avLst/>
@@ -5421,14 +6062,20 @@
           </a:ln>
         </p:spPr>
         <p:txBody>
-          <a:bodyPr xmlns:a="http://schemas.openxmlformats.org/drawingml/2006/main" lIns="0" tIns="0" rIns="0" bIns="0" anchor="ctr"/>
+          <a:bodyPr xmlns:a="http://schemas.openxmlformats.org/drawingml/2006/main" wrap="square" lIns="0" tIns="0" rIns="0" bIns="0" anchor="ctr">
+            <a:noAutofit/>
+          </a:bodyPr>
           <a:lstStyle xmlns:a="http://schemas.openxmlformats.org/drawingml/2006/main"/>
           <a:p xmlns:a="http://schemas.openxmlformats.org/drawingml/2006/main">
             <a:pPr>
+              <a:buNone/>
               <a:defRPr sz="2550" b="0">
                 <a:solidFill>
                   <a:srgbClr val="152B3A"/>
                 </a:solidFill>
+                <a:latin typeface="Arial"/>
+                <a:ea typeface="Arial"/>
+                <a:cs typeface="Arial"/>
               </a:defRPr>
             </a:pPr>
             <a:r>
@@ -5436,6 +6083,9 @@
                 <a:solidFill>
                   <a:srgbClr val="152B3A"/>
                 </a:solidFill>
+                <a:latin typeface="Arial"/>
+                <a:ea typeface="Arial"/>
+                <a:cs typeface="Arial"/>
               </a:rPr>
               <a:t>Start with the chicken card in case A.</a:t>
             </a:r>
@@ -5458,8 +6108,8 @@
         </p:nvSpPr>
         <p:spPr>
           <a:xfrm xmlns:a="http://schemas.openxmlformats.org/drawingml/2006/main">
-            <a:off x="609600" y="3409950"/>
-            <a:ext cx="10972800" cy="714375"/>
+            <a:off x="609600" y="3143250"/>
+            <a:ext cx="7096125" cy="704850"/>
           </a:xfrm>
           <a:prstGeom xmlns:a="http://schemas.openxmlformats.org/drawingml/2006/main" prst="rect">
             <a:avLst/>
@@ -5471,14 +6121,20 @@
           </a:ln>
         </p:spPr>
         <p:txBody>
-          <a:bodyPr xmlns:a="http://schemas.openxmlformats.org/drawingml/2006/main" lIns="0" tIns="0" rIns="0" bIns="0" anchor="ctr"/>
+          <a:bodyPr xmlns:a="http://schemas.openxmlformats.org/drawingml/2006/main" wrap="square" lIns="0" tIns="0" rIns="0" bIns="0" anchor="ctr">
+            <a:noAutofit/>
+          </a:bodyPr>
           <a:lstStyle xmlns:a="http://schemas.openxmlformats.org/drawingml/2006/main"/>
           <a:p xmlns:a="http://schemas.openxmlformats.org/drawingml/2006/main">
             <a:pPr>
+              <a:buNone/>
               <a:defRPr sz="2550" b="0">
                 <a:solidFill>
                   <a:srgbClr val="152B3A"/>
                 </a:solidFill>
+                <a:latin typeface="Arial"/>
+                <a:ea typeface="Arial"/>
+                <a:cs typeface="Arial"/>
               </a:defRPr>
             </a:pPr>
             <a:r>
@@ -5486,6 +6142,9 @@
                 <a:solidFill>
                   <a:srgbClr val="152B3A"/>
                 </a:solidFill>
+                <a:latin typeface="Arial"/>
+                <a:ea typeface="Arial"/>
+                <a:cs typeface="Arial"/>
               </a:rPr>
               <a:t>Use beans to make a meat-free model.</a:t>
             </a:r>
@@ -5508,8 +6167,8 @@
         </p:nvSpPr>
         <p:spPr>
           <a:xfrm xmlns:a="http://schemas.openxmlformats.org/drawingml/2006/main">
-            <a:off x="609600" y="4200525"/>
-            <a:ext cx="10972800" cy="714375"/>
+            <a:off x="609600" y="3981450"/>
+            <a:ext cx="7096125" cy="704850"/>
           </a:xfrm>
           <a:prstGeom xmlns:a="http://schemas.openxmlformats.org/drawingml/2006/main" prst="rect">
             <a:avLst/>
@@ -5521,14 +6180,20 @@
           </a:ln>
         </p:spPr>
         <p:txBody>
-          <a:bodyPr xmlns:a="http://schemas.openxmlformats.org/drawingml/2006/main" lIns="0" tIns="0" rIns="0" bIns="0" anchor="ctr"/>
+          <a:bodyPr xmlns:a="http://schemas.openxmlformats.org/drawingml/2006/main" wrap="square" lIns="0" tIns="0" rIns="0" bIns="0" anchor="ctr">
+            <a:noAutofit/>
+          </a:bodyPr>
           <a:lstStyle xmlns:a="http://schemas.openxmlformats.org/drawingml/2006/main"/>
           <a:p xmlns:a="http://schemas.openxmlformats.org/drawingml/2006/main">
             <a:pPr>
+              <a:buNone/>
               <a:defRPr sz="2550" b="0">
                 <a:solidFill>
                   <a:srgbClr val="152B3A"/>
                 </a:solidFill>
+                <a:latin typeface="Arial"/>
+                <a:ea typeface="Arial"/>
+                <a:cs typeface="Arial"/>
               </a:defRPr>
             </a:pPr>
             <a:r>
@@ -5536,6 +6201,9 @@
                 <a:solidFill>
                   <a:srgbClr val="152B3A"/>
                 </a:solidFill>
+                <a:latin typeface="Arial"/>
+                <a:ea typeface="Arial"/>
+                <a:cs typeface="Arial"/>
               </a:rPr>
               <a:t>Name the broad group that stays the same.</a:t>
             </a:r>
@@ -5558,8 +6226,8 @@
         </p:nvSpPr>
         <p:spPr>
           <a:xfrm xmlns:a="http://schemas.openxmlformats.org/drawingml/2006/main">
-            <a:off x="609600" y="4991100"/>
-            <a:ext cx="10972800" cy="714375"/>
+            <a:off x="609600" y="4819650"/>
+            <a:ext cx="7096125" cy="704850"/>
           </a:xfrm>
           <a:prstGeom xmlns:a="http://schemas.openxmlformats.org/drawingml/2006/main" prst="rect">
             <a:avLst/>
@@ -5571,27 +6239,58 @@
           </a:ln>
         </p:spPr>
         <p:txBody>
-          <a:bodyPr xmlns:a="http://schemas.openxmlformats.org/drawingml/2006/main" lIns="0" tIns="0" rIns="0" bIns="0" anchor="ctr"/>
+          <a:bodyPr xmlns:a="http://schemas.openxmlformats.org/drawingml/2006/main" wrap="square" lIns="0" tIns="0" rIns="0" bIns="0" anchor="ctr">
+            <a:noAutofit/>
+          </a:bodyPr>
           <a:lstStyle xmlns:a="http://schemas.openxmlformats.org/drawingml/2006/main"/>
           <a:p xmlns:a="http://schemas.openxmlformats.org/drawingml/2006/main">
             <a:pPr>
-              <a:defRPr sz="2550" b="0">
-                <a:solidFill>
-                  <a:srgbClr val="152B3A"/>
-                </a:solidFill>
+              <a:buNone/>
+              <a:defRPr sz="2550" b="1">
+                <a:solidFill>
+                  <a:srgbClr val="28685E"/>
+                </a:solidFill>
+                <a:latin typeface="Arial"/>
+                <a:ea typeface="Arial"/>
+                <a:cs typeface="Arial"/>
               </a:defRPr>
             </a:pPr>
             <a:r>
-              <a:rPr sz="2550" b="0">
-                <a:solidFill>
-                  <a:srgbClr val="152B3A"/>
-                </a:solidFill>
+              <a:rPr sz="2550" b="1">
+                <a:solidFill>
+                  <a:srgbClr val="28685E"/>
+                </a:solidFill>
+                <a:latin typeface="Arial"/>
+                <a:ea typeface="Arial"/>
+                <a:cs typeface="Arial"/>
               </a:rPr>
               <a:t>Could lentils be another option?</a:t>
             </a:r>
           </a:p>
         </p:txBody>
       </p:sp>
+      <p:pic>
+        <p:nvPicPr>
+          <p:cNvPr id="26" name=""/>
+          <p:cNvPicPr>
+            <a:picLocks xmlns:a="http://schemas.openxmlformats.org/drawingml/2006/main" noChangeAspect="1"/>
+          </p:cNvPicPr>
+          <p:nvPr/>
+        </p:nvPicPr>
+        <p:blipFill>
+          <a:blip xmlns:r="http://schemas.openxmlformats.org/officeDocument/2006/relationships" xmlns:a="http://schemas.openxmlformats.org/drawingml/2006/main" r:embed="R2c7b16cafbc34899"/>
+          <a:stretch xmlns:a="http://schemas.openxmlformats.org/drawingml/2006/main"/>
+        </p:blipFill>
+        <p:spPr>
+          <a:xfrm xmlns:a="http://schemas.openxmlformats.org/drawingml/2006/main">
+            <a:off x="8429625" y="2818720"/>
+            <a:ext cx="2857500" cy="2449286"/>
+          </a:xfrm>
+          <a:prstGeom xmlns:a="http://schemas.openxmlformats.org/drawingml/2006/main" prst="rect">
+            <a:avLst/>
+          </a:prstGeom>
+        </p:spPr>
+      </p:pic>
     </p:spTree>
     <p:extLst>
       <p:ext uri="{BB962C8B-B14F-4D97-AF65-F5344CB8AC3E}">
@@ -5608,7 +6307,7 @@
     <p:bg>
       <p:bgPr>
         <a:solidFill xmlns:a="http://schemas.openxmlformats.org/drawingml/2006/main">
-          <a:srgbClr val="F5F1E8"/>
+          <a:srgbClr val="FBF9F3"/>
         </a:solidFill>
       </p:bgPr>
     </p:bg>
@@ -5637,8 +6336,8 @@
         </p:nvSpPr>
         <p:spPr>
           <a:xfrm xmlns:a="http://schemas.openxmlformats.org/drawingml/2006/main">
-            <a:off x="609600" y="552450"/>
-            <a:ext cx="781050" cy="57150"/>
+            <a:off x="609600" y="742950"/>
+            <a:ext cx="9906000" cy="38100"/>
           </a:xfrm>
           <a:prstGeom xmlns:a="http://schemas.openxmlformats.org/drawingml/2006/main" prst="rect">
             <a:avLst/>
@@ -5668,8 +6367,8 @@
         </p:nvSpPr>
         <p:spPr>
           <a:xfrm xmlns:a="http://schemas.openxmlformats.org/drawingml/2006/main">
-            <a:off x="609600" y="762000"/>
-            <a:ext cx="9334500" cy="285750"/>
+            <a:off x="609600" y="342900"/>
+            <a:ext cx="9334500" cy="266700"/>
           </a:xfrm>
           <a:prstGeom xmlns:a="http://schemas.openxmlformats.org/drawingml/2006/main" prst="rect">
             <a:avLst/>
@@ -5681,21 +6380,30 @@
           </a:ln>
         </p:spPr>
         <p:txBody>
-          <a:bodyPr xmlns:a="http://schemas.openxmlformats.org/drawingml/2006/main" lIns="0" tIns="0" rIns="0" bIns="0" anchor="ctr"/>
+          <a:bodyPr xmlns:a="http://schemas.openxmlformats.org/drawingml/2006/main" wrap="square" lIns="0" tIns="0" rIns="0" bIns="0" anchor="ctr">
+            <a:noAutofit/>
+          </a:bodyPr>
           <a:lstStyle xmlns:a="http://schemas.openxmlformats.org/drawingml/2006/main"/>
           <a:p xmlns:a="http://schemas.openxmlformats.org/drawingml/2006/main">
             <a:pPr>
-              <a:defRPr sz="1500" b="1">
+              <a:buNone/>
+              <a:defRPr sz="1425" b="1">
                 <a:solidFill>
                   <a:srgbClr val="28685E"/>
                 </a:solidFill>
+                <a:latin typeface="Arial"/>
+                <a:ea typeface="Arial"/>
+                <a:cs typeface="Arial"/>
               </a:defRPr>
             </a:pPr>
             <a:r>
-              <a:rPr sz="1500" b="1">
+              <a:rPr sz="1425" b="1">
                 <a:solidFill>
                   <a:srgbClr val="28685E"/>
                 </a:solidFill>
+                <a:latin typeface="Arial"/>
+                <a:ea typeface="Arial"/>
+                <a:cs typeface="Arial"/>
               </a:rPr>
               <a:t>MADE BY MATT  /  BUILD SCIENCE</a:t>
             </a:r>
@@ -5704,14 +6412,14 @@
       </p:sp>
       <p:pic>
         <p:nvPicPr>
-          <p:cNvPr id="13" name=""/>
+          <p:cNvPr id="15" name=""/>
           <p:cNvPicPr>
             <a:picLocks xmlns:a="http://schemas.openxmlformats.org/drawingml/2006/main" noChangeAspect="1"/>
           </p:cNvPicPr>
           <p:nvPr/>
         </p:nvPicPr>
         <p:blipFill>
-          <a:blip xmlns:r="http://schemas.openxmlformats.org/officeDocument/2006/relationships" xmlns:a="http://schemas.openxmlformats.org/drawingml/2006/main" r:embed="R4558fbe133b444f0"/>
+          <a:blip xmlns:r="http://schemas.openxmlformats.org/officeDocument/2006/relationships" xmlns:a="http://schemas.openxmlformats.org/drawingml/2006/main" r:embed="R513447f0d6b74746"/>
           <a:stretch xmlns:a="http://schemas.openxmlformats.org/drawingml/2006/main"/>
         </p:blipFill>
         <p:spPr>
@@ -5740,8 +6448,8 @@
         </p:nvSpPr>
         <p:spPr>
           <a:xfrm xmlns:a="http://schemas.openxmlformats.org/drawingml/2006/main">
-            <a:off x="609600" y="1352550"/>
-            <a:ext cx="10972800" cy="952500"/>
+            <a:off x="609600" y="1047750"/>
+            <a:ext cx="10972800" cy="895350"/>
           </a:xfrm>
           <a:prstGeom xmlns:a="http://schemas.openxmlformats.org/drawingml/2006/main" prst="rect">
             <a:avLst/>
@@ -5753,21 +6461,30 @@
           </a:ln>
         </p:spPr>
         <p:txBody>
-          <a:bodyPr xmlns:a="http://schemas.openxmlformats.org/drawingml/2006/main" lIns="0" tIns="0" rIns="0" bIns="0" anchor="ctr"/>
+          <a:bodyPr xmlns:a="http://schemas.openxmlformats.org/drawingml/2006/main" wrap="square" lIns="0" tIns="0" rIns="0" bIns="0" anchor="ctr">
+            <a:noAutofit/>
+          </a:bodyPr>
           <a:lstStyle xmlns:a="http://schemas.openxmlformats.org/drawingml/2006/main"/>
           <a:p xmlns:a="http://schemas.openxmlformats.org/drawingml/2006/main">
             <a:pPr>
-              <a:defRPr sz="3750" b="1">
+              <a:buNone/>
+              <a:defRPr sz="3600" b="1">
                 <a:solidFill>
                   <a:srgbClr val="152B3A"/>
                 </a:solidFill>
+                <a:latin typeface="Arial"/>
+                <a:ea typeface="Arial"/>
+                <a:cs typeface="Arial"/>
               </a:defRPr>
             </a:pPr>
             <a:r>
-              <a:rPr sz="3750" b="1">
+              <a:rPr sz="3600" b="1">
                 <a:solidFill>
                   <a:srgbClr val="152B3A"/>
                 </a:solidFill>
+                <a:latin typeface="Arial"/>
+                <a:ea typeface="Arial"/>
+                <a:cs typeface="Arial"/>
               </a:rPr>
               <a:t>Pause and check what is missing</a:t>
             </a:r>
@@ -5834,21 +6551,30 @@
           </a:ln>
         </p:spPr>
         <p:txBody>
-          <a:bodyPr xmlns:a="http://schemas.openxmlformats.org/drawingml/2006/main" lIns="0" tIns="0" rIns="0" bIns="0" anchor="ctr"/>
+          <a:bodyPr xmlns:a="http://schemas.openxmlformats.org/drawingml/2006/main" wrap="square" lIns="0" tIns="0" rIns="0" bIns="0" anchor="ctr">
+            <a:noAutofit/>
+          </a:bodyPr>
           <a:lstStyle xmlns:a="http://schemas.openxmlformats.org/drawingml/2006/main"/>
           <a:p xmlns:a="http://schemas.openxmlformats.org/drawingml/2006/main">
             <a:pPr>
-              <a:defRPr sz="1275" b="0">
+              <a:buNone/>
+              <a:defRPr sz="1200" b="0">
                 <a:solidFill>
                   <a:srgbClr val="50616B"/>
                 </a:solidFill>
+                <a:latin typeface="Arial"/>
+                <a:ea typeface="Arial"/>
+                <a:cs typeface="Arial"/>
               </a:defRPr>
             </a:pPr>
             <a:r>
-              <a:rPr sz="1275" b="0">
+              <a:rPr sz="1200" b="0">
                 <a:solidFill>
                   <a:srgbClr val="50616B"/>
                 </a:solidFill>
+                <a:latin typeface="Arial"/>
+                <a:ea typeface="Arial"/>
+                <a:cs typeface="Arial"/>
               </a:rPr>
               <a:t>AUTUMN 1  ·  WEEK 6  ·  LESSON B</a:t>
             </a:r>
@@ -5884,14 +6610,20 @@
           </a:ln>
         </p:spPr>
         <p:txBody>
-          <a:bodyPr xmlns:a="http://schemas.openxmlformats.org/drawingml/2006/main" lIns="0" tIns="0" rIns="0" bIns="0" anchor="ctr"/>
+          <a:bodyPr xmlns:a="http://schemas.openxmlformats.org/drawingml/2006/main" wrap="square" lIns="0" tIns="0" rIns="0" bIns="0" anchor="ctr">
+            <a:noAutofit/>
+          </a:bodyPr>
           <a:lstStyle xmlns:a="http://schemas.openxmlformats.org/drawingml/2006/main"/>
           <a:p xmlns:a="http://schemas.openxmlformats.org/drawingml/2006/main">
             <a:pPr>
+              <a:buNone/>
               <a:defRPr sz="1350" b="1">
                 <a:solidFill>
                   <a:srgbClr val="28685E"/>
                 </a:solidFill>
+                <a:latin typeface="Arial"/>
+                <a:ea typeface="Arial"/>
+                <a:cs typeface="Arial"/>
               </a:defRPr>
             </a:pPr>
             <a:r>
@@ -5899,6 +6631,9 @@
                 <a:solidFill>
                   <a:srgbClr val="28685E"/>
                 </a:solidFill>
+                <a:latin typeface="Arial"/>
+                <a:ea typeface="Arial"/>
+                <a:cs typeface="Arial"/>
               </a:rPr>
               <a:t>07</a:t>
             </a:r>
@@ -5921,8 +6656,8 @@
         </p:nvSpPr>
         <p:spPr>
           <a:xfrm xmlns:a="http://schemas.openxmlformats.org/drawingml/2006/main">
-            <a:off x="609600" y="2619375"/>
-            <a:ext cx="10972800" cy="781050"/>
+            <a:off x="609600" y="2305050"/>
+            <a:ext cx="10972800" cy="914400"/>
           </a:xfrm>
           <a:prstGeom xmlns:a="http://schemas.openxmlformats.org/drawingml/2006/main" prst="rect">
             <a:avLst/>
@@ -5934,14 +6669,20 @@
           </a:ln>
         </p:spPr>
         <p:txBody>
-          <a:bodyPr xmlns:a="http://schemas.openxmlformats.org/drawingml/2006/main" lIns="0" tIns="0" rIns="0" bIns="0" anchor="ctr"/>
+          <a:bodyPr xmlns:a="http://schemas.openxmlformats.org/drawingml/2006/main" wrap="square" lIns="0" tIns="0" rIns="0" bIns="0" anchor="ctr">
+            <a:noAutofit/>
+          </a:bodyPr>
           <a:lstStyle xmlns:a="http://schemas.openxmlformats.org/drawingml/2006/main"/>
           <a:p xmlns:a="http://schemas.openxmlformats.org/drawingml/2006/main">
             <a:pPr>
+              <a:buNone/>
               <a:defRPr sz="2550" b="0">
                 <a:solidFill>
                   <a:srgbClr val="152B3A"/>
                 </a:solidFill>
+                <a:latin typeface="Arial"/>
+                <a:ea typeface="Arial"/>
+                <a:cs typeface="Arial"/>
               </a:defRPr>
             </a:pPr>
             <a:r>
@@ -5949,6 +6690,9 @@
                 <a:solidFill>
                   <a:srgbClr val="152B3A"/>
                 </a:solidFill>
+                <a:latin typeface="Arial"/>
+                <a:ea typeface="Arial"/>
+                <a:cs typeface="Arial"/>
               </a:rPr>
               <a:t>Check the five-group reference.</a:t>
             </a:r>
@@ -5971,8 +6715,8 @@
         </p:nvSpPr>
         <p:spPr>
           <a:xfrm xmlns:a="http://schemas.openxmlformats.org/drawingml/2006/main">
-            <a:off x="609600" y="3476625"/>
-            <a:ext cx="10972800" cy="781050"/>
+            <a:off x="609600" y="3352800"/>
+            <a:ext cx="10972800" cy="914400"/>
           </a:xfrm>
           <a:prstGeom xmlns:a="http://schemas.openxmlformats.org/drawingml/2006/main" prst="rect">
             <a:avLst/>
@@ -5984,14 +6728,20 @@
           </a:ln>
         </p:spPr>
         <p:txBody>
-          <a:bodyPr xmlns:a="http://schemas.openxmlformats.org/drawingml/2006/main" lIns="0" tIns="0" rIns="0" bIns="0" anchor="ctr"/>
+          <a:bodyPr xmlns:a="http://schemas.openxmlformats.org/drawingml/2006/main" wrap="square" lIns="0" tIns="0" rIns="0" bIns="0" anchor="ctr">
+            <a:noAutofit/>
+          </a:bodyPr>
           <a:lstStyle xmlns:a="http://schemas.openxmlformats.org/drawingml/2006/main"/>
           <a:p xmlns:a="http://schemas.openxmlformats.org/drawingml/2006/main">
             <a:pPr>
+              <a:buNone/>
               <a:defRPr sz="2550" b="0">
                 <a:solidFill>
                   <a:srgbClr val="152B3A"/>
                 </a:solidFill>
+                <a:latin typeface="Arial"/>
+                <a:ea typeface="Arial"/>
+                <a:cs typeface="Arial"/>
               </a:defRPr>
             </a:pPr>
             <a:r>
@@ -5999,6 +6749,9 @@
                 <a:solidFill>
                   <a:srgbClr val="152B3A"/>
                 </a:solidFill>
+                <a:latin typeface="Arial"/>
+                <a:ea typeface="Arial"/>
+                <a:cs typeface="Arial"/>
               </a:rPr>
               <a:t>Does either model show every group?</a:t>
             </a:r>
@@ -6021,8 +6774,8 @@
         </p:nvSpPr>
         <p:spPr>
           <a:xfrm xmlns:a="http://schemas.openxmlformats.org/drawingml/2006/main">
-            <a:off x="609600" y="4333875"/>
-            <a:ext cx="10972800" cy="781050"/>
+            <a:off x="609600" y="4400550"/>
+            <a:ext cx="10972800" cy="914400"/>
           </a:xfrm>
           <a:prstGeom xmlns:a="http://schemas.openxmlformats.org/drawingml/2006/main" prst="rect">
             <a:avLst/>
@@ -6034,21 +6787,30 @@
           </a:ln>
         </p:spPr>
         <p:txBody>
-          <a:bodyPr xmlns:a="http://schemas.openxmlformats.org/drawingml/2006/main" lIns="0" tIns="0" rIns="0" bIns="0" anchor="ctr"/>
+          <a:bodyPr xmlns:a="http://schemas.openxmlformats.org/drawingml/2006/main" wrap="square" lIns="0" tIns="0" rIns="0" bIns="0" anchor="ctr">
+            <a:noAutofit/>
+          </a:bodyPr>
           <a:lstStyle xmlns:a="http://schemas.openxmlformats.org/drawingml/2006/main"/>
           <a:p xmlns:a="http://schemas.openxmlformats.org/drawingml/2006/main">
             <a:pPr>
-              <a:defRPr sz="2550" b="0">
-                <a:solidFill>
-                  <a:srgbClr val="152B3A"/>
-                </a:solidFill>
+              <a:buNone/>
+              <a:defRPr sz="2550" b="1">
+                <a:solidFill>
+                  <a:srgbClr val="28685E"/>
+                </a:solidFill>
+                <a:latin typeface="Arial"/>
+                <a:ea typeface="Arial"/>
+                <a:cs typeface="Arial"/>
               </a:defRPr>
             </a:pPr>
             <a:r>
-              <a:rPr sz="2550" b="0">
-                <a:solidFill>
-                  <a:srgbClr val="152B3A"/>
-                </a:solidFill>
+              <a:rPr sz="2550" b="1">
+                <a:solidFill>
+                  <a:srgbClr val="28685E"/>
+                </a:solidFill>
+                <a:latin typeface="Arial"/>
+                <a:ea typeface="Arial"/>
+                <a:cs typeface="Arial"/>
               </a:rPr>
               <a:t>Could a food appear at another time?</a:t>
             </a:r>
@@ -6071,7 +6833,7 @@
     <p:bg>
       <p:bgPr>
         <a:solidFill xmlns:a="http://schemas.openxmlformats.org/drawingml/2006/main">
-          <a:srgbClr val="F5F1E8"/>
+          <a:srgbClr val="FBF9F3"/>
         </a:solidFill>
       </p:bgPr>
     </p:bg>
@@ -6100,8 +6862,8 @@
         </p:nvSpPr>
         <p:spPr>
           <a:xfrm xmlns:a="http://schemas.openxmlformats.org/drawingml/2006/main">
-            <a:off x="609600" y="552450"/>
-            <a:ext cx="781050" cy="57150"/>
+            <a:off x="609600" y="742950"/>
+            <a:ext cx="9906000" cy="38100"/>
           </a:xfrm>
           <a:prstGeom xmlns:a="http://schemas.openxmlformats.org/drawingml/2006/main" prst="rect">
             <a:avLst/>
@@ -6131,8 +6893,8 @@
         </p:nvSpPr>
         <p:spPr>
           <a:xfrm xmlns:a="http://schemas.openxmlformats.org/drawingml/2006/main">
-            <a:off x="609600" y="762000"/>
-            <a:ext cx="9334500" cy="285750"/>
+            <a:off x="609600" y="342900"/>
+            <a:ext cx="9334500" cy="266700"/>
           </a:xfrm>
           <a:prstGeom xmlns:a="http://schemas.openxmlformats.org/drawingml/2006/main" prst="rect">
             <a:avLst/>
@@ -6144,21 +6906,30 @@
           </a:ln>
         </p:spPr>
         <p:txBody>
-          <a:bodyPr xmlns:a="http://schemas.openxmlformats.org/drawingml/2006/main" lIns="0" tIns="0" rIns="0" bIns="0" anchor="ctr"/>
+          <a:bodyPr xmlns:a="http://schemas.openxmlformats.org/drawingml/2006/main" wrap="square" lIns="0" tIns="0" rIns="0" bIns="0" anchor="ctr">
+            <a:noAutofit/>
+          </a:bodyPr>
           <a:lstStyle xmlns:a="http://schemas.openxmlformats.org/drawingml/2006/main"/>
           <a:p xmlns:a="http://schemas.openxmlformats.org/drawingml/2006/main">
             <a:pPr>
-              <a:defRPr sz="1500" b="1">
+              <a:buNone/>
+              <a:defRPr sz="1425" b="1">
                 <a:solidFill>
                   <a:srgbClr val="28685E"/>
                 </a:solidFill>
+                <a:latin typeface="Arial"/>
+                <a:ea typeface="Arial"/>
+                <a:cs typeface="Arial"/>
               </a:defRPr>
             </a:pPr>
             <a:r>
-              <a:rPr sz="1500" b="1">
+              <a:rPr sz="1425" b="1">
                 <a:solidFill>
                   <a:srgbClr val="28685E"/>
                 </a:solidFill>
+                <a:latin typeface="Arial"/>
+                <a:ea typeface="Arial"/>
+                <a:cs typeface="Arial"/>
               </a:rPr>
               <a:t>MADE BY MATT  /  BUILD SCIENCE</a:t>
             </a:r>
@@ -6167,14 +6938,14 @@
       </p:sp>
       <p:pic>
         <p:nvPicPr>
-          <p:cNvPr id="14" name=""/>
+          <p:cNvPr id="16" name=""/>
           <p:cNvPicPr>
             <a:picLocks xmlns:a="http://schemas.openxmlformats.org/drawingml/2006/main" noChangeAspect="1"/>
           </p:cNvPicPr>
           <p:nvPr/>
         </p:nvPicPr>
         <p:blipFill>
-          <a:blip xmlns:r="http://schemas.openxmlformats.org/officeDocument/2006/relationships" xmlns:a="http://schemas.openxmlformats.org/drawingml/2006/main" r:embed="R24486b03bf934a83"/>
+          <a:blip xmlns:r="http://schemas.openxmlformats.org/officeDocument/2006/relationships" xmlns:a="http://schemas.openxmlformats.org/drawingml/2006/main" r:embed="Rd9a5d9fe8b8b4f15"/>
           <a:stretch xmlns:a="http://schemas.openxmlformats.org/drawingml/2006/main"/>
         </p:blipFill>
         <p:spPr>
@@ -6203,8 +6974,8 @@
         </p:nvSpPr>
         <p:spPr>
           <a:xfrm xmlns:a="http://schemas.openxmlformats.org/drawingml/2006/main">
-            <a:off x="609600" y="1352550"/>
-            <a:ext cx="10972800" cy="952500"/>
+            <a:off x="609600" y="1047750"/>
+            <a:ext cx="10972800" cy="895350"/>
           </a:xfrm>
           <a:prstGeom xmlns:a="http://schemas.openxmlformats.org/drawingml/2006/main" prst="rect">
             <a:avLst/>
@@ -6216,21 +6987,30 @@
           </a:ln>
         </p:spPr>
         <p:txBody>
-          <a:bodyPr xmlns:a="http://schemas.openxmlformats.org/drawingml/2006/main" lIns="0" tIns="0" rIns="0" bIns="0" anchor="ctr"/>
+          <a:bodyPr xmlns:a="http://schemas.openxmlformats.org/drawingml/2006/main" wrap="square" lIns="0" tIns="0" rIns="0" bIns="0" anchor="ctr">
+            <a:noAutofit/>
+          </a:bodyPr>
           <a:lstStyle xmlns:a="http://schemas.openxmlformats.org/drawingml/2006/main"/>
           <a:p xmlns:a="http://schemas.openxmlformats.org/drawingml/2006/main">
             <a:pPr>
-              <a:defRPr sz="3750" b="1">
+              <a:buNone/>
+              <a:defRPr sz="3600" b="1">
                 <a:solidFill>
                   <a:srgbClr val="152B3A"/>
                 </a:solidFill>
+                <a:latin typeface="Arial"/>
+                <a:ea typeface="Arial"/>
+                <a:cs typeface="Arial"/>
               </a:defRPr>
             </a:pPr>
             <a:r>
-              <a:rPr sz="3750" b="1">
+              <a:rPr sz="3600" b="1">
                 <a:solidFill>
                   <a:srgbClr val="152B3A"/>
                 </a:solidFill>
+                <a:latin typeface="Arial"/>
+                <a:ea typeface="Arial"/>
+                <a:cs typeface="Arial"/>
               </a:rPr>
               <a:t>Revise, explain and keep evidence</a:t>
             </a:r>
@@ -6297,21 +7077,30 @@
           </a:ln>
         </p:spPr>
         <p:txBody>
-          <a:bodyPr xmlns:a="http://schemas.openxmlformats.org/drawingml/2006/main" lIns="0" tIns="0" rIns="0" bIns="0" anchor="ctr"/>
+          <a:bodyPr xmlns:a="http://schemas.openxmlformats.org/drawingml/2006/main" wrap="square" lIns="0" tIns="0" rIns="0" bIns="0" anchor="ctr">
+            <a:noAutofit/>
+          </a:bodyPr>
           <a:lstStyle xmlns:a="http://schemas.openxmlformats.org/drawingml/2006/main"/>
           <a:p xmlns:a="http://schemas.openxmlformats.org/drawingml/2006/main">
             <a:pPr>
-              <a:defRPr sz="1275" b="0">
+              <a:buNone/>
+              <a:defRPr sz="1200" b="0">
                 <a:solidFill>
                   <a:srgbClr val="50616B"/>
                 </a:solidFill>
+                <a:latin typeface="Arial"/>
+                <a:ea typeface="Arial"/>
+                <a:cs typeface="Arial"/>
               </a:defRPr>
             </a:pPr>
             <a:r>
-              <a:rPr sz="1275" b="0">
+              <a:rPr sz="1200" b="0">
                 <a:solidFill>
                   <a:srgbClr val="50616B"/>
                 </a:solidFill>
+                <a:latin typeface="Arial"/>
+                <a:ea typeface="Arial"/>
+                <a:cs typeface="Arial"/>
               </a:rPr>
               <a:t>AUTUMN 1  ·  WEEK 6  ·  LESSON B</a:t>
             </a:r>
@@ -6347,14 +7136,20 @@
           </a:ln>
         </p:spPr>
         <p:txBody>
-          <a:bodyPr xmlns:a="http://schemas.openxmlformats.org/drawingml/2006/main" lIns="0" tIns="0" rIns="0" bIns="0" anchor="ctr"/>
+          <a:bodyPr xmlns:a="http://schemas.openxmlformats.org/drawingml/2006/main" wrap="square" lIns="0" tIns="0" rIns="0" bIns="0" anchor="ctr">
+            <a:noAutofit/>
+          </a:bodyPr>
           <a:lstStyle xmlns:a="http://schemas.openxmlformats.org/drawingml/2006/main"/>
           <a:p xmlns:a="http://schemas.openxmlformats.org/drawingml/2006/main">
             <a:pPr>
+              <a:buNone/>
               <a:defRPr sz="1350" b="1">
                 <a:solidFill>
                   <a:srgbClr val="28685E"/>
                 </a:solidFill>
+                <a:latin typeface="Arial"/>
+                <a:ea typeface="Arial"/>
+                <a:cs typeface="Arial"/>
               </a:defRPr>
             </a:pPr>
             <a:r>
@@ -6362,6 +7157,9 @@
                 <a:solidFill>
                   <a:srgbClr val="28685E"/>
                 </a:solidFill>
+                <a:latin typeface="Arial"/>
+                <a:ea typeface="Arial"/>
+                <a:cs typeface="Arial"/>
               </a:rPr>
               <a:t>08</a:t>
             </a:r>
@@ -6384,8 +7182,8 @@
         </p:nvSpPr>
         <p:spPr>
           <a:xfrm xmlns:a="http://schemas.openxmlformats.org/drawingml/2006/main">
-            <a:off x="609600" y="2619375"/>
-            <a:ext cx="10972800" cy="714375"/>
+            <a:off x="609600" y="2305050"/>
+            <a:ext cx="10972800" cy="704850"/>
           </a:xfrm>
           <a:prstGeom xmlns:a="http://schemas.openxmlformats.org/drawingml/2006/main" prst="rect">
             <a:avLst/>
@@ -6397,14 +7195,20 @@
           </a:ln>
         </p:spPr>
         <p:txBody>
-          <a:bodyPr xmlns:a="http://schemas.openxmlformats.org/drawingml/2006/main" lIns="0" tIns="0" rIns="0" bIns="0" anchor="ctr"/>
+          <a:bodyPr xmlns:a="http://schemas.openxmlformats.org/drawingml/2006/main" wrap="square" lIns="0" tIns="0" rIns="0" bIns="0" anchor="ctr">
+            <a:noAutofit/>
+          </a:bodyPr>
           <a:lstStyle xmlns:a="http://schemas.openxmlformats.org/drawingml/2006/main"/>
           <a:p xmlns:a="http://schemas.openxmlformats.org/drawingml/2006/main">
             <a:pPr>
+              <a:buNone/>
               <a:defRPr sz="2550" b="0">
                 <a:solidFill>
                   <a:srgbClr val="152B3A"/>
                 </a:solidFill>
+                <a:latin typeface="Arial"/>
+                <a:ea typeface="Arial"/>
+                <a:cs typeface="Arial"/>
               </a:defRPr>
             </a:pPr>
             <a:r>
@@ -6412,6 +7216,9 @@
                 <a:solidFill>
                   <a:srgbClr val="152B3A"/>
                 </a:solidFill>
+                <a:latin typeface="Arial"/>
+                <a:ea typeface="Arial"/>
+                <a:cs typeface="Arial"/>
               </a:rPr>
               <a:t>Keep your first and revised models together.</a:t>
             </a:r>
@@ -6434,8 +7241,8 @@
         </p:nvSpPr>
         <p:spPr>
           <a:xfrm xmlns:a="http://schemas.openxmlformats.org/drawingml/2006/main">
-            <a:off x="609600" y="3409950"/>
-            <a:ext cx="10972800" cy="714375"/>
+            <a:off x="609600" y="3143250"/>
+            <a:ext cx="10972800" cy="704850"/>
           </a:xfrm>
           <a:prstGeom xmlns:a="http://schemas.openxmlformats.org/drawingml/2006/main" prst="rect">
             <a:avLst/>
@@ -6447,14 +7254,20 @@
           </a:ln>
         </p:spPr>
         <p:txBody>
-          <a:bodyPr xmlns:a="http://schemas.openxmlformats.org/drawingml/2006/main" lIns="0" tIns="0" rIns="0" bIns="0" anchor="ctr"/>
+          <a:bodyPr xmlns:a="http://schemas.openxmlformats.org/drawingml/2006/main" wrap="square" lIns="0" tIns="0" rIns="0" bIns="0" anchor="ctr">
+            <a:noAutofit/>
+          </a:bodyPr>
           <a:lstStyle xmlns:a="http://schemas.openxmlformats.org/drawingml/2006/main"/>
           <a:p xmlns:a="http://schemas.openxmlformats.org/drawingml/2006/main">
             <a:pPr>
+              <a:buNone/>
               <a:defRPr sz="2550" b="0">
                 <a:solidFill>
                   <a:srgbClr val="152B3A"/>
                 </a:solidFill>
+                <a:latin typeface="Arial"/>
+                <a:ea typeface="Arial"/>
+                <a:cs typeface="Arial"/>
               </a:defRPr>
             </a:pPr>
             <a:r>
@@ -6462,6 +7275,9 @@
                 <a:solidFill>
                   <a:srgbClr val="152B3A"/>
                 </a:solidFill>
+                <a:latin typeface="Arial"/>
+                <a:ea typeface="Arial"/>
+                <a:cs typeface="Arial"/>
               </a:rPr>
               <a:t>Give a reason for one swap.</a:t>
             </a:r>
@@ -6484,8 +7300,8 @@
         </p:nvSpPr>
         <p:spPr>
           <a:xfrm xmlns:a="http://schemas.openxmlformats.org/drawingml/2006/main">
-            <a:off x="609600" y="4200525"/>
-            <a:ext cx="10972800" cy="714375"/>
+            <a:off x="609600" y="3981450"/>
+            <a:ext cx="10972800" cy="704850"/>
           </a:xfrm>
           <a:prstGeom xmlns:a="http://schemas.openxmlformats.org/drawingml/2006/main" prst="rect">
             <a:avLst/>
@@ -6497,14 +7313,20 @@
           </a:ln>
         </p:spPr>
         <p:txBody>
-          <a:bodyPr xmlns:a="http://schemas.openxmlformats.org/drawingml/2006/main" lIns="0" tIns="0" rIns="0" bIns="0" anchor="ctr"/>
+          <a:bodyPr xmlns:a="http://schemas.openxmlformats.org/drawingml/2006/main" wrap="square" lIns="0" tIns="0" rIns="0" bIns="0" anchor="ctr">
+            <a:noAutofit/>
+          </a:bodyPr>
           <a:lstStyle xmlns:a="http://schemas.openxmlformats.org/drawingml/2006/main"/>
           <a:p xmlns:a="http://schemas.openxmlformats.org/drawingml/2006/main">
             <a:pPr>
+              <a:buNone/>
               <a:defRPr sz="2550" b="0">
                 <a:solidFill>
                   <a:srgbClr val="152B3A"/>
                 </a:solidFill>
+                <a:latin typeface="Arial"/>
+                <a:ea typeface="Arial"/>
+                <a:cs typeface="Arial"/>
               </a:defRPr>
             </a:pPr>
             <a:r>
@@ -6512,6 +7334,9 @@
                 <a:solidFill>
                   <a:srgbClr val="152B3A"/>
                 </a:solidFill>
+                <a:latin typeface="Arial"/>
+                <a:ea typeface="Arial"/>
+                <a:cs typeface="Arial"/>
               </a:rPr>
               <a:t>Name one thing the model cannot tell us.</a:t>
             </a:r>
@@ -6534,8 +7359,8 @@
         </p:nvSpPr>
         <p:spPr>
           <a:xfrm xmlns:a="http://schemas.openxmlformats.org/drawingml/2006/main">
-            <a:off x="609600" y="4991100"/>
-            <a:ext cx="10972800" cy="714375"/>
+            <a:off x="609600" y="4819650"/>
+            <a:ext cx="10972800" cy="704850"/>
           </a:xfrm>
           <a:prstGeom xmlns:a="http://schemas.openxmlformats.org/drawingml/2006/main" prst="rect">
             <a:avLst/>
@@ -6547,21 +7372,30 @@
           </a:ln>
         </p:spPr>
         <p:txBody>
-          <a:bodyPr xmlns:a="http://schemas.openxmlformats.org/drawingml/2006/main" lIns="0" tIns="0" rIns="0" bIns="0" anchor="ctr"/>
+          <a:bodyPr xmlns:a="http://schemas.openxmlformats.org/drawingml/2006/main" wrap="square" lIns="0" tIns="0" rIns="0" bIns="0" anchor="ctr">
+            <a:noAutofit/>
+          </a:bodyPr>
           <a:lstStyle xmlns:a="http://schemas.openxmlformats.org/drawingml/2006/main"/>
           <a:p xmlns:a="http://schemas.openxmlformats.org/drawingml/2006/main">
             <a:pPr>
-              <a:defRPr sz="2550" b="0">
-                <a:solidFill>
-                  <a:srgbClr val="152B3A"/>
-                </a:solidFill>
+              <a:buNone/>
+              <a:defRPr sz="2550" b="1">
+                <a:solidFill>
+                  <a:srgbClr val="28685E"/>
+                </a:solidFill>
+                <a:latin typeface="Arial"/>
+                <a:ea typeface="Arial"/>
+                <a:cs typeface="Arial"/>
               </a:defRPr>
             </a:pPr>
             <a:r>
-              <a:rPr sz="2550" b="0">
-                <a:solidFill>
-                  <a:srgbClr val="152B3A"/>
-                </a:solidFill>
+              <a:rPr sz="2550" b="1">
+                <a:solidFill>
+                  <a:srgbClr val="28685E"/>
+                </a:solidFill>
+                <a:latin typeface="Arial"/>
+                <a:ea typeface="Arial"/>
+                <a:cs typeface="Arial"/>
               </a:rPr>
               <a:t>Save the record and put cards away.</a:t>
             </a:r>
@@ -6584,7 +7418,7 @@
     <p:bg>
       <p:bgPr>
         <a:solidFill xmlns:a="http://schemas.openxmlformats.org/drawingml/2006/main">
-          <a:srgbClr val="F5F1E8"/>
+          <a:srgbClr val="FBF9F3"/>
         </a:solidFill>
       </p:bgPr>
     </p:bg>
@@ -6613,8 +7447,8 @@
         </p:nvSpPr>
         <p:spPr>
           <a:xfrm xmlns:a="http://schemas.openxmlformats.org/drawingml/2006/main">
-            <a:off x="609600" y="552450"/>
-            <a:ext cx="781050" cy="57150"/>
+            <a:off x="609600" y="742950"/>
+            <a:ext cx="9906000" cy="38100"/>
           </a:xfrm>
           <a:prstGeom xmlns:a="http://schemas.openxmlformats.org/drawingml/2006/main" prst="rect">
             <a:avLst/>
@@ -6644,8 +7478,8 @@
         </p:nvSpPr>
         <p:spPr>
           <a:xfrm xmlns:a="http://schemas.openxmlformats.org/drawingml/2006/main">
-            <a:off x="609600" y="762000"/>
-            <a:ext cx="9334500" cy="285750"/>
+            <a:off x="609600" y="342900"/>
+            <a:ext cx="9334500" cy="266700"/>
           </a:xfrm>
           <a:prstGeom xmlns:a="http://schemas.openxmlformats.org/drawingml/2006/main" prst="rect">
             <a:avLst/>
@@ -6657,21 +7491,30 @@
           </a:ln>
         </p:spPr>
         <p:txBody>
-          <a:bodyPr xmlns:a="http://schemas.openxmlformats.org/drawingml/2006/main" lIns="0" tIns="0" rIns="0" bIns="0" anchor="ctr"/>
+          <a:bodyPr xmlns:a="http://schemas.openxmlformats.org/drawingml/2006/main" wrap="square" lIns="0" tIns="0" rIns="0" bIns="0" anchor="ctr">
+            <a:noAutofit/>
+          </a:bodyPr>
           <a:lstStyle xmlns:a="http://schemas.openxmlformats.org/drawingml/2006/main"/>
           <a:p xmlns:a="http://schemas.openxmlformats.org/drawingml/2006/main">
             <a:pPr>
-              <a:defRPr sz="1500" b="1">
+              <a:buNone/>
+              <a:defRPr sz="1425" b="1">
                 <a:solidFill>
                   <a:srgbClr val="28685E"/>
                 </a:solidFill>
+                <a:latin typeface="Arial"/>
+                <a:ea typeface="Arial"/>
+                <a:cs typeface="Arial"/>
               </a:defRPr>
             </a:pPr>
             <a:r>
-              <a:rPr sz="1500" b="1">
+              <a:rPr sz="1425" b="1">
                 <a:solidFill>
                   <a:srgbClr val="28685E"/>
                 </a:solidFill>
+                <a:latin typeface="Arial"/>
+                <a:ea typeface="Arial"/>
+                <a:cs typeface="Arial"/>
               </a:rPr>
               <a:t>MADE BY MATT  /  BUILD SCIENCE</a:t>
             </a:r>
@@ -6680,14 +7523,14 @@
       </p:sp>
       <p:pic>
         <p:nvPicPr>
-          <p:cNvPr id="14" name=""/>
+          <p:cNvPr id="16" name=""/>
           <p:cNvPicPr>
             <a:picLocks xmlns:a="http://schemas.openxmlformats.org/drawingml/2006/main" noChangeAspect="1"/>
           </p:cNvPicPr>
           <p:nvPr/>
         </p:nvPicPr>
         <p:blipFill>
-          <a:blip xmlns:r="http://schemas.openxmlformats.org/officeDocument/2006/relationships" xmlns:a="http://schemas.openxmlformats.org/drawingml/2006/main" r:embed="R3b72a828c3434af9"/>
+          <a:blip xmlns:r="http://schemas.openxmlformats.org/officeDocument/2006/relationships" xmlns:a="http://schemas.openxmlformats.org/drawingml/2006/main" r:embed="Rf52f6e451f314d37"/>
           <a:stretch xmlns:a="http://schemas.openxmlformats.org/drawingml/2006/main"/>
         </p:blipFill>
         <p:spPr>
@@ -6716,8 +7559,8 @@
         </p:nvSpPr>
         <p:spPr>
           <a:xfrm xmlns:a="http://schemas.openxmlformats.org/drawingml/2006/main">
-            <a:off x="609600" y="1352550"/>
-            <a:ext cx="10972800" cy="952500"/>
+            <a:off x="609600" y="1047750"/>
+            <a:ext cx="10972800" cy="895350"/>
           </a:xfrm>
           <a:prstGeom xmlns:a="http://schemas.openxmlformats.org/drawingml/2006/main" prst="rect">
             <a:avLst/>
@@ -6729,21 +7572,30 @@
           </a:ln>
         </p:spPr>
         <p:txBody>
-          <a:bodyPr xmlns:a="http://schemas.openxmlformats.org/drawingml/2006/main" lIns="0" tIns="0" rIns="0" bIns="0" anchor="ctr"/>
+          <a:bodyPr xmlns:a="http://schemas.openxmlformats.org/drawingml/2006/main" wrap="square" lIns="0" tIns="0" rIns="0" bIns="0" anchor="ctr">
+            <a:noAutofit/>
+          </a:bodyPr>
           <a:lstStyle xmlns:a="http://schemas.openxmlformats.org/drawingml/2006/main"/>
           <a:p xmlns:a="http://schemas.openxmlformats.org/drawingml/2006/main">
             <a:pPr>
-              <a:defRPr sz="3750" b="1">
+              <a:buNone/>
+              <a:defRPr sz="3600" b="1">
                 <a:solidFill>
                   <a:srgbClr val="152B3A"/>
                 </a:solidFill>
+                <a:latin typeface="Arial"/>
+                <a:ea typeface="Arial"/>
+                <a:cs typeface="Arial"/>
               </a:defRPr>
             </a:pPr>
             <a:r>
-              <a:rPr sz="3750" b="1">
+              <a:rPr sz="3600" b="1">
                 <a:solidFill>
                   <a:srgbClr val="152B3A"/>
                 </a:solidFill>
+                <a:latin typeface="Arial"/>
+                <a:ea typeface="Arial"/>
+                <a:cs typeface="Arial"/>
               </a:rPr>
               <a:t>Your voice can change the lesson</a:t>
             </a:r>
@@ -6810,21 +7662,30 @@
           </a:ln>
         </p:spPr>
         <p:txBody>
-          <a:bodyPr xmlns:a="http://schemas.openxmlformats.org/drawingml/2006/main" lIns="0" tIns="0" rIns="0" bIns="0" anchor="ctr"/>
+          <a:bodyPr xmlns:a="http://schemas.openxmlformats.org/drawingml/2006/main" wrap="square" lIns="0" tIns="0" rIns="0" bIns="0" anchor="ctr">
+            <a:noAutofit/>
+          </a:bodyPr>
           <a:lstStyle xmlns:a="http://schemas.openxmlformats.org/drawingml/2006/main"/>
           <a:p xmlns:a="http://schemas.openxmlformats.org/drawingml/2006/main">
             <a:pPr>
-              <a:defRPr sz="1275" b="0">
+              <a:buNone/>
+              <a:defRPr sz="1200" b="0">
                 <a:solidFill>
                   <a:srgbClr val="50616B"/>
                 </a:solidFill>
+                <a:latin typeface="Arial"/>
+                <a:ea typeface="Arial"/>
+                <a:cs typeface="Arial"/>
               </a:defRPr>
             </a:pPr>
             <a:r>
-              <a:rPr sz="1275" b="0">
+              <a:rPr sz="1200" b="0">
                 <a:solidFill>
                   <a:srgbClr val="50616B"/>
                 </a:solidFill>
+                <a:latin typeface="Arial"/>
+                <a:ea typeface="Arial"/>
+                <a:cs typeface="Arial"/>
               </a:rPr>
               <a:t>AUTUMN 1  ·  WEEK 6  ·  LESSON B</a:t>
             </a:r>
@@ -6860,14 +7721,20 @@
           </a:ln>
         </p:spPr>
         <p:txBody>
-          <a:bodyPr xmlns:a="http://schemas.openxmlformats.org/drawingml/2006/main" lIns="0" tIns="0" rIns="0" bIns="0" anchor="ctr"/>
+          <a:bodyPr xmlns:a="http://schemas.openxmlformats.org/drawingml/2006/main" wrap="square" lIns="0" tIns="0" rIns="0" bIns="0" anchor="ctr">
+            <a:noAutofit/>
+          </a:bodyPr>
           <a:lstStyle xmlns:a="http://schemas.openxmlformats.org/drawingml/2006/main"/>
           <a:p xmlns:a="http://schemas.openxmlformats.org/drawingml/2006/main">
             <a:pPr>
+              <a:buNone/>
               <a:defRPr sz="1350" b="1">
                 <a:solidFill>
                   <a:srgbClr val="28685E"/>
                 </a:solidFill>
+                <a:latin typeface="Arial"/>
+                <a:ea typeface="Arial"/>
+                <a:cs typeface="Arial"/>
               </a:defRPr>
             </a:pPr>
             <a:r>
@@ -6875,6 +7742,9 @@
                 <a:solidFill>
                   <a:srgbClr val="28685E"/>
                 </a:solidFill>
+                <a:latin typeface="Arial"/>
+                <a:ea typeface="Arial"/>
+                <a:cs typeface="Arial"/>
               </a:rPr>
               <a:t>09</a:t>
             </a:r>
@@ -6897,8 +7767,8 @@
         </p:nvSpPr>
         <p:spPr>
           <a:xfrm xmlns:a="http://schemas.openxmlformats.org/drawingml/2006/main">
-            <a:off x="609600" y="2619375"/>
-            <a:ext cx="10972800" cy="714375"/>
+            <a:off x="609600" y="2305050"/>
+            <a:ext cx="10972800" cy="704850"/>
           </a:xfrm>
           <a:prstGeom xmlns:a="http://schemas.openxmlformats.org/drawingml/2006/main" prst="rect">
             <a:avLst/>
@@ -6910,14 +7780,20 @@
           </a:ln>
         </p:spPr>
         <p:txBody>
-          <a:bodyPr xmlns:a="http://schemas.openxmlformats.org/drawingml/2006/main" lIns="0" tIns="0" rIns="0" bIns="0" anchor="ctr"/>
+          <a:bodyPr xmlns:a="http://schemas.openxmlformats.org/drawingml/2006/main" wrap="square" lIns="0" tIns="0" rIns="0" bIns="0" anchor="ctr">
+            <a:noAutofit/>
+          </a:bodyPr>
           <a:lstStyle xmlns:a="http://schemas.openxmlformats.org/drawingml/2006/main"/>
           <a:p xmlns:a="http://schemas.openxmlformats.org/drawingml/2006/main">
             <a:pPr>
+              <a:buNone/>
               <a:defRPr sz="2550" b="0">
                 <a:solidFill>
                   <a:srgbClr val="152B3A"/>
                 </a:solidFill>
+                <a:latin typeface="Arial"/>
+                <a:ea typeface="Arial"/>
+                <a:cs typeface="Arial"/>
               </a:defRPr>
             </a:pPr>
             <a:r>
@@ -6925,6 +7801,9 @@
                 <a:solidFill>
                   <a:srgbClr val="152B3A"/>
                 </a:solidFill>
+                <a:latin typeface="Arial"/>
+                <a:ea typeface="Arial"/>
+                <a:cs typeface="Arial"/>
               </a:rPr>
               <a:t>What helped you join in?</a:t>
             </a:r>
@@ -6947,8 +7826,8 @@
         </p:nvSpPr>
         <p:spPr>
           <a:xfrm xmlns:a="http://schemas.openxmlformats.org/drawingml/2006/main">
-            <a:off x="609600" y="3409950"/>
-            <a:ext cx="10972800" cy="714375"/>
+            <a:off x="609600" y="3143250"/>
+            <a:ext cx="10972800" cy="704850"/>
           </a:xfrm>
           <a:prstGeom xmlns:a="http://schemas.openxmlformats.org/drawingml/2006/main" prst="rect">
             <a:avLst/>
@@ -6960,14 +7839,20 @@
           </a:ln>
         </p:spPr>
         <p:txBody>
-          <a:bodyPr xmlns:a="http://schemas.openxmlformats.org/drawingml/2006/main" lIns="0" tIns="0" rIns="0" bIns="0" anchor="ctr"/>
+          <a:bodyPr xmlns:a="http://schemas.openxmlformats.org/drawingml/2006/main" wrap="square" lIns="0" tIns="0" rIns="0" bIns="0" anchor="ctr">
+            <a:noAutofit/>
+          </a:bodyPr>
           <a:lstStyle xmlns:a="http://schemas.openxmlformats.org/drawingml/2006/main"/>
           <a:p xmlns:a="http://schemas.openxmlformats.org/drawingml/2006/main">
             <a:pPr>
+              <a:buNone/>
               <a:defRPr sz="2550" b="0">
                 <a:solidFill>
                   <a:srgbClr val="152B3A"/>
                 </a:solidFill>
+                <a:latin typeface="Arial"/>
+                <a:ea typeface="Arial"/>
+                <a:cs typeface="Arial"/>
               </a:defRPr>
             </a:pPr>
             <a:r>
@@ -6975,6 +7860,9 @@
                 <a:solidFill>
                   <a:srgbClr val="152B3A"/>
                 </a:solidFill>
+                <a:latin typeface="Arial"/>
+                <a:ea typeface="Arial"/>
+                <a:cs typeface="Arial"/>
               </a:rPr>
               <a:t>What could make the next activity easier?</a:t>
             </a:r>
@@ -6997,8 +7885,8 @@
         </p:nvSpPr>
         <p:spPr>
           <a:xfrm xmlns:a="http://schemas.openxmlformats.org/drawingml/2006/main">
-            <a:off x="609600" y="4200525"/>
-            <a:ext cx="10972800" cy="714375"/>
+            <a:off x="609600" y="3981450"/>
+            <a:ext cx="10972800" cy="704850"/>
           </a:xfrm>
           <a:prstGeom xmlns:a="http://schemas.openxmlformats.org/drawingml/2006/main" prst="rect">
             <a:avLst/>
@@ -7010,14 +7898,20 @@
           </a:ln>
         </p:spPr>
         <p:txBody>
-          <a:bodyPr xmlns:a="http://schemas.openxmlformats.org/drawingml/2006/main" lIns="0" tIns="0" rIns="0" bIns="0" anchor="ctr"/>
+          <a:bodyPr xmlns:a="http://schemas.openxmlformats.org/drawingml/2006/main" wrap="square" lIns="0" tIns="0" rIns="0" bIns="0" anchor="ctr">
+            <a:noAutofit/>
+          </a:bodyPr>
           <a:lstStyle xmlns:a="http://schemas.openxmlformats.org/drawingml/2006/main"/>
           <a:p xmlns:a="http://schemas.openxmlformats.org/drawingml/2006/main">
             <a:pPr>
+              <a:buNone/>
               <a:defRPr sz="2550" b="0">
                 <a:solidFill>
                   <a:srgbClr val="152B3A"/>
                 </a:solidFill>
+                <a:latin typeface="Arial"/>
+                <a:ea typeface="Arial"/>
+                <a:cs typeface="Arial"/>
               </a:defRPr>
             </a:pPr>
             <a:r>
@@ -7025,6 +7919,9 @@
                 <a:solidFill>
                   <a:srgbClr val="152B3A"/>
                 </a:solidFill>
+                <a:latin typeface="Arial"/>
+                <a:ea typeface="Arial"/>
+                <a:cs typeface="Arial"/>
               </a:rPr>
               <a:t>Point, sign, speak, write or pass privately.</a:t>
             </a:r>
@@ -7047,8 +7944,8 @@
         </p:nvSpPr>
         <p:spPr>
           <a:xfrm xmlns:a="http://schemas.openxmlformats.org/drawingml/2006/main">
-            <a:off x="609600" y="4991100"/>
-            <a:ext cx="10972800" cy="714375"/>
+            <a:off x="609600" y="4819650"/>
+            <a:ext cx="10972800" cy="704850"/>
           </a:xfrm>
           <a:prstGeom xmlns:a="http://schemas.openxmlformats.org/drawingml/2006/main" prst="rect">
             <a:avLst/>
@@ -7060,21 +7957,30 @@
           </a:ln>
         </p:spPr>
         <p:txBody>
-          <a:bodyPr xmlns:a="http://schemas.openxmlformats.org/drawingml/2006/main" lIns="0" tIns="0" rIns="0" bIns="0" anchor="ctr"/>
+          <a:bodyPr xmlns:a="http://schemas.openxmlformats.org/drawingml/2006/main" wrap="square" lIns="0" tIns="0" rIns="0" bIns="0" anchor="ctr">
+            <a:noAutofit/>
+          </a:bodyPr>
           <a:lstStyle xmlns:a="http://schemas.openxmlformats.org/drawingml/2006/main"/>
           <a:p xmlns:a="http://schemas.openxmlformats.org/drawingml/2006/main">
             <a:pPr>
-              <a:defRPr sz="2550" b="0">
-                <a:solidFill>
-                  <a:srgbClr val="152B3A"/>
-                </a:solidFill>
+              <a:buNone/>
+              <a:defRPr sz="2550" b="1">
+                <a:solidFill>
+                  <a:srgbClr val="28685E"/>
+                </a:solidFill>
+                <a:latin typeface="Arial"/>
+                <a:ea typeface="Arial"/>
+                <a:cs typeface="Arial"/>
               </a:defRPr>
             </a:pPr>
             <a:r>
-              <a:rPr sz="2550" b="0">
-                <a:solidFill>
-                  <a:srgbClr val="152B3A"/>
-                </a:solidFill>
+              <a:rPr sz="2550" b="1">
+                <a:solidFill>
+                  <a:srgbClr val="28685E"/>
+                </a:solidFill>
+                <a:latin typeface="Arial"/>
+                <a:ea typeface="Arial"/>
+                <a:cs typeface="Arial"/>
               </a:rPr>
               <a:t>Adult: agree one change and explain any limit.</a:t>
             </a:r>
